--- a/eu_ai_adoption_gap_project/presentation/eu_ai_adoption_gap.pptx
+++ b/eu_ai_adoption_gap_project/presentation/eu_ai_adoption_gap.pptx
@@ -2,24 +2,24 @@
 <file path=ppt/presentation.xml><?xml version="1.0" encoding="utf-8"?>
 <p:presentation xmlns:p="http://schemas.openxmlformats.org/presentationml/2006/main">
   <p:sldMasterIdLst>
-    <p:sldMasterId xmlns:r="http://schemas.openxmlformats.org/officeDocument/2006/relationships" id="2147483648" r:id="Rf85d253c0fbc4c28"/>
+    <p:sldMasterId xmlns:r="http://schemas.openxmlformats.org/officeDocument/2006/relationships" id="2147483648" r:id="R11c52eac588e4ea2"/>
   </p:sldMasterIdLst>
   <p:notesMasterIdLst>
-    <p:notesMasterId xmlns:r="http://schemas.openxmlformats.org/officeDocument/2006/relationships" r:id="R31e0e23385b24613"/>
+    <p:notesMasterId xmlns:r="http://schemas.openxmlformats.org/officeDocument/2006/relationships" r:id="R74a8a673a67747e0"/>
   </p:notesMasterIdLst>
   <p:sldIdLst>
-    <p:sldId xmlns:r="http://schemas.openxmlformats.org/officeDocument/2006/relationships" id="256" r:id="Rf087dec262904383"/>
-    <p:sldId xmlns:r="http://schemas.openxmlformats.org/officeDocument/2006/relationships" id="257" r:id="Re7e9e0fb5f224c6d"/>
-    <p:sldId xmlns:r="http://schemas.openxmlformats.org/officeDocument/2006/relationships" id="258" r:id="R139d275833b145b7"/>
-    <p:sldId xmlns:r="http://schemas.openxmlformats.org/officeDocument/2006/relationships" id="259" r:id="R5349f110fe4940f5"/>
-    <p:sldId xmlns:r="http://schemas.openxmlformats.org/officeDocument/2006/relationships" id="260" r:id="R3d0bdf3c0f404e00"/>
-    <p:sldId xmlns:r="http://schemas.openxmlformats.org/officeDocument/2006/relationships" id="261" r:id="R7ac529f8a7994372"/>
-    <p:sldId xmlns:r="http://schemas.openxmlformats.org/officeDocument/2006/relationships" id="262" r:id="R8adc218247c54330"/>
-    <p:sldId xmlns:r="http://schemas.openxmlformats.org/officeDocument/2006/relationships" id="263" r:id="R42bca3f5a0db447d"/>
-    <p:sldId xmlns:r="http://schemas.openxmlformats.org/officeDocument/2006/relationships" id="264" r:id="Ra181f9b59263474e"/>
-    <p:sldId xmlns:r="http://schemas.openxmlformats.org/officeDocument/2006/relationships" id="265" r:id="R29b051a62b524d8b"/>
-    <p:sldId xmlns:r="http://schemas.openxmlformats.org/officeDocument/2006/relationships" id="266" r:id="Re3ab565cad4a4cb3"/>
-    <p:sldId xmlns:r="http://schemas.openxmlformats.org/officeDocument/2006/relationships" id="267" r:id="R25186f841d064b15"/>
+    <p:sldId xmlns:r="http://schemas.openxmlformats.org/officeDocument/2006/relationships" id="256" r:id="Rc83ae7e57fce4557"/>
+    <p:sldId xmlns:r="http://schemas.openxmlformats.org/officeDocument/2006/relationships" id="257" r:id="R72c2b5eac9344ed4"/>
+    <p:sldId xmlns:r="http://schemas.openxmlformats.org/officeDocument/2006/relationships" id="258" r:id="R59010beccaf342e2"/>
+    <p:sldId xmlns:r="http://schemas.openxmlformats.org/officeDocument/2006/relationships" id="259" r:id="R5240a96336394535"/>
+    <p:sldId xmlns:r="http://schemas.openxmlformats.org/officeDocument/2006/relationships" id="260" r:id="Ref04c17f45714c62"/>
+    <p:sldId xmlns:r="http://schemas.openxmlformats.org/officeDocument/2006/relationships" id="261" r:id="R191543a19c30406d"/>
+    <p:sldId xmlns:r="http://schemas.openxmlformats.org/officeDocument/2006/relationships" id="262" r:id="Rbb508a4f695b4848"/>
+    <p:sldId xmlns:r="http://schemas.openxmlformats.org/officeDocument/2006/relationships" id="263" r:id="Re9f47f8549ae47bd"/>
+    <p:sldId xmlns:r="http://schemas.openxmlformats.org/officeDocument/2006/relationships" id="264" r:id="R6cfaf231b8f54e48"/>
+    <p:sldId xmlns:r="http://schemas.openxmlformats.org/officeDocument/2006/relationships" id="265" r:id="Rf06dc33f58b84e64"/>
+    <p:sldId xmlns:r="http://schemas.openxmlformats.org/officeDocument/2006/relationships" id="266" r:id="R6f15592f24d841df"/>
+    <p:sldId xmlns:r="http://schemas.openxmlformats.org/officeDocument/2006/relationships" id="267" r:id="R3c3f06a82b7a45ea"/>
   </p:sldIdLst>
   <p:sldSz cx="12192000" cy="6858000"/>
   <p:notesSz cx="6858000" cy="9144000"/>
@@ -738,7 +738,7 @@
           <a:lstStyle xmlns:a="http://schemas.openxmlformats.org/drawingml/2006/main"/>
           <a:p xmlns:a="http://schemas.openxmlformats.org/drawingml/2006/main">
             <a:r>
-              <a:t>This slide must be updated with the final Streamlit Community Cloud URL after the repository is published.</a:t>
+              <a:t>The dashboard is deployed publicly and the link shown on this slide was verified on 25 July 2026.</a:t>
             </a:r>
           </a:p>
           <a:p xmlns:a="http://schemas.openxmlformats.org/drawingml/2006/main">
@@ -764,6 +764,11 @@
           <a:p xmlns:a="http://schemas.openxmlformats.org/drawingml/2006/main">
             <a:r>
               <a:t>- https://ec.europa.eu/eurostat/statistics-explained/index.php?title=Use_of_artificial_intelligence_in_enterprises</a:t>
+            </a:r>
+          </a:p>
+          <a:p xmlns:a="http://schemas.openxmlformats.org/drawingml/2006/main">
+            <a:r>
+              <a:t>- https://usaid-eu-ai-adoption-gap.streamlit.app/ (dashboard screenshots, captured 25 July 2026)</a:t>
             </a:r>
           </a:p>
           <a:p xmlns:a="http://schemas.openxmlformats.org/drawingml/2006/main">
@@ -1676,7 +1681,7 @@
   </p:cSld>
   <p:clrMap bg1="lt1" tx1="dk1" bg2="lt2" tx2="dk2" accent1="accent1" accent2="accent2" accent3="accent3" accent4="accent4" accent5="accent5" accent6="accent6" hlink="hlink" folHlink="folHlink"/>
   <p:sldLayoutIdLst>
-    <p:sldLayoutId xmlns:r="http://schemas.openxmlformats.org/officeDocument/2006/relationships" id="2147483649" r:id="Ra6ae769905954b9a"/>
+    <p:sldLayoutId xmlns:r="http://schemas.openxmlformats.org/officeDocument/2006/relationships" id="2147483649" r:id="Rf87efc046615489e"/>
   </p:sldLayoutIdLst>
   <p:txStyles>
     <p:titleStyle>
@@ -2220,7 +2225,7 @@
           <p:cNvPr id="1" name="Google-Shape-532-p58-2">
             <a:extLst xmlns:a="http://schemas.openxmlformats.org/drawingml/2006/main">
               <a:ext uri="{FF2B5EF4-FFF2-40B4-BE49-F238E27FC236}">
-                <a16:creationId xmlns:a16="http://schemas.microsoft.com/office/drawing/2014/main" id="{F4D3E9BE-D481-41A3-9CAD-94405ED6E645}"/>
+                <a16:creationId xmlns:a16="http://schemas.microsoft.com/office/drawing/2014/main" id="{516081EE-FF0B-4F97-815C-FE48396331CB}"/>
               </a:ext>
             </a:extLst>
           </p:cNvPr>
@@ -2245,6 +2250,7 @@
           <a:lstStyle xmlns:a="http://schemas.openxmlformats.org/drawingml/2006/main"/>
           <a:p xmlns:a="http://schemas.openxmlformats.org/drawingml/2006/main">
             <a:pPr algn="r">
+              <a:buNone/>
               <a:defRPr sz="1000">
                 <a:solidFill>
                   <a:srgbClr val="000000"/>
@@ -2265,7 +2271,7 @@
           <p:cNvPr id="2" name="Google-Shape-533-p58-3">
             <a:extLst xmlns:a="http://schemas.openxmlformats.org/drawingml/2006/main">
               <a:ext uri="{FF2B5EF4-FFF2-40B4-BE49-F238E27FC236}">
-                <a16:creationId xmlns:a16="http://schemas.microsoft.com/office/drawing/2014/main" id="{1CAC7A1B-E2F9-43CB-A347-9FAA3CD97C82}"/>
+                <a16:creationId xmlns:a16="http://schemas.microsoft.com/office/drawing/2014/main" id="{8AABA391-7276-4C18-9923-77BAAD43A059}"/>
               </a:ext>
             </a:extLst>
           </p:cNvPr>
@@ -2322,7 +2328,7 @@
           <p:cNvPr id="3" name="Picture-3-4-backing">
             <a:extLst xmlns:a="http://schemas.openxmlformats.org/drawingml/2006/main">
               <a:ext uri="{FF2B5EF4-FFF2-40B4-BE49-F238E27FC236}">
-                <a16:creationId xmlns:a16="http://schemas.microsoft.com/office/drawing/2014/main" id="{39C44AD9-FA01-47EA-A25D-45D66EB03006}"/>
+                <a16:creationId xmlns:a16="http://schemas.microsoft.com/office/drawing/2014/main" id="{AED497BE-4E8E-4B0F-8590-2C84979C5E5E}"/>
               </a:ext>
             </a:extLst>
           </p:cNvPr>
@@ -2354,14 +2360,14 @@
       </p:sp>
       <p:pic>
         <p:nvPicPr>
-          <p:cNvPr id="9" name="Picture-3-4"/>
+          <p:cNvPr id="10" name="Picture-3-4"/>
           <p:cNvPicPr>
             <a:picLocks xmlns:a="http://schemas.openxmlformats.org/drawingml/2006/main" noChangeAspect="1"/>
           </p:cNvPicPr>
           <p:nvPr/>
         </p:nvPicPr>
         <p:blipFill>
-          <a:blip xmlns:r="http://schemas.openxmlformats.org/officeDocument/2006/relationships" xmlns:a="http://schemas.openxmlformats.org/drawingml/2006/main" r:embed="R14bf5dfedb314cc9"/>
+          <a:blip xmlns:r="http://schemas.openxmlformats.org/officeDocument/2006/relationships" xmlns:a="http://schemas.openxmlformats.org/drawingml/2006/main" r:embed="Rc0248f6d1f9845f7"/>
           <a:stretch xmlns:a="http://schemas.openxmlformats.org/drawingml/2006/main"/>
         </p:blipFill>
         <p:spPr>
@@ -2379,7 +2385,7 @@
           <p:cNvPr id="5" name="Google-Shape-534-p58-5">
             <a:extLst xmlns:a="http://schemas.openxmlformats.org/drawingml/2006/main">
               <a:ext uri="{FF2B5EF4-FFF2-40B4-BE49-F238E27FC236}">
-                <a16:creationId xmlns:a16="http://schemas.microsoft.com/office/drawing/2014/main" id="{34F7BF47-6DD2-4EE3-B559-C2E5125F12CC}"/>
+                <a16:creationId xmlns:a16="http://schemas.microsoft.com/office/drawing/2014/main" id="{E311D77D-FCEB-4FEE-98AF-60EE550D6F12}"/>
               </a:ext>
             </a:extLst>
           </p:cNvPr>
@@ -2466,7 +2472,7 @@
     </p:spTree>
     <p:extLst>
       <p:ext uri="{BB962C8B-B14F-4D97-AF65-F5344CB8AC3E}">
-        <p14:creationId xmlns:p14="http://schemas.microsoft.com/office/powerpoint/2010/main" val="546902952"/>
+        <p14:creationId xmlns:p14="http://schemas.microsoft.com/office/powerpoint/2010/main" val="1233310417"/>
       </p:ext>
     </p:extLst>
   </p:cSld>
@@ -2497,7 +2503,7 @@
           <p:cNvPr id="1" name="title-10">
             <a:extLst xmlns:a="http://schemas.openxmlformats.org/drawingml/2006/main">
               <a:ext uri="{FF2B5EF4-FFF2-40B4-BE49-F238E27FC236}">
-                <a16:creationId xmlns:a16="http://schemas.microsoft.com/office/drawing/2014/main" id="{FC1D71C7-296C-43D9-8A84-31746681A15D}"/>
+                <a16:creationId xmlns:a16="http://schemas.microsoft.com/office/drawing/2014/main" id="{6BC4072D-B4A2-4902-B24A-287ED9E22D51}"/>
               </a:ext>
             </a:extLst>
           </p:cNvPr>
@@ -2527,6 +2533,7 @@
           <a:lstStyle xmlns:a="http://schemas.openxmlformats.org/drawingml/2006/main"/>
           <a:p xmlns:a="http://schemas.openxmlformats.org/drawingml/2006/main">
             <a:pPr algn="l">
+              <a:buNone/>
               <a:defRPr sz="3525" b="1">
                 <a:solidFill>
                   <a:srgbClr val="172033"/>
@@ -2552,14 +2559,14 @@
       </p:sp>
       <p:pic>
         <p:nvPicPr>
-          <p:cNvPr id="12" name=""/>
+          <p:cNvPr id="13" name=""/>
           <p:cNvPicPr>
             <a:picLocks xmlns:a="http://schemas.openxmlformats.org/drawingml/2006/main" noChangeAspect="1"/>
           </p:cNvPicPr>
           <p:nvPr/>
         </p:nvPicPr>
         <p:blipFill>
-          <a:blip xmlns:r="http://schemas.openxmlformats.org/officeDocument/2006/relationships" xmlns:a="http://schemas.openxmlformats.org/drawingml/2006/main" r:embed="Rc50f0521f4644454"/>
+          <a:blip xmlns:r="http://schemas.openxmlformats.org/officeDocument/2006/relationships" xmlns:a="http://schemas.openxmlformats.org/drawingml/2006/main" r:embed="R6223d9f887f74a06"/>
           <a:stretch xmlns:a="http://schemas.openxmlformats.org/drawingml/2006/main"/>
         </p:blipFill>
         <p:spPr>
@@ -2577,7 +2584,7 @@
           <p:cNvPr id="3" name="rail-header-10">
             <a:extLst xmlns:a="http://schemas.openxmlformats.org/drawingml/2006/main">
               <a:ext uri="{FF2B5EF4-FFF2-40B4-BE49-F238E27FC236}">
-                <a16:creationId xmlns:a16="http://schemas.microsoft.com/office/drawing/2014/main" id="{29B2BD2E-F5FA-4931-82C7-206E997B781F}"/>
+                <a16:creationId xmlns:a16="http://schemas.microsoft.com/office/drawing/2014/main" id="{75E32160-8238-4842-A720-8CFBCBEA3B01}"/>
               </a:ext>
             </a:extLst>
           </p:cNvPr>
@@ -2607,6 +2614,7 @@
           <a:lstStyle xmlns:a="http://schemas.openxmlformats.org/drawingml/2006/main"/>
           <a:p xmlns:a="http://schemas.openxmlformats.org/drawingml/2006/main">
             <a:pPr algn="l">
+              <a:buNone/>
               <a:defRPr sz="1800" b="1">
                 <a:solidFill>
                   <a:srgbClr val="172033"/>
@@ -2635,7 +2643,7 @@
           <p:cNvPr id="4" name="stat-10-218">
             <a:extLst xmlns:a="http://schemas.openxmlformats.org/drawingml/2006/main">
               <a:ext uri="{FF2B5EF4-FFF2-40B4-BE49-F238E27FC236}">
-                <a16:creationId xmlns:a16="http://schemas.microsoft.com/office/drawing/2014/main" id="{20869031-7E4B-416A-BA7D-F694B3DD4578}"/>
+                <a16:creationId xmlns:a16="http://schemas.microsoft.com/office/drawing/2014/main" id="{BBF7F831-86F5-45B6-B5DF-A80E0D6D2C69}"/>
               </a:ext>
             </a:extLst>
           </p:cNvPr>
@@ -2665,6 +2673,7 @@
           <a:lstStyle xmlns:a="http://schemas.openxmlformats.org/drawingml/2006/main"/>
           <a:p xmlns:a="http://schemas.openxmlformats.org/drawingml/2006/main">
             <a:pPr algn="l">
+              <a:buNone/>
               <a:defRPr sz="3375" b="1">
                 <a:solidFill>
                   <a:srgbClr val="E69F00"/>
@@ -2693,7 +2702,7 @@
           <p:cNvPr id="5" name="stat-label-10-218">
             <a:extLst xmlns:a="http://schemas.openxmlformats.org/drawingml/2006/main">
               <a:ext uri="{FF2B5EF4-FFF2-40B4-BE49-F238E27FC236}">
-                <a16:creationId xmlns:a16="http://schemas.microsoft.com/office/drawing/2014/main" id="{0FE2CE34-B94D-4D61-9962-5B84BFB5FE1F}"/>
+                <a16:creationId xmlns:a16="http://schemas.microsoft.com/office/drawing/2014/main" id="{F12BF0B5-275C-493E-9020-D593D1BD1BB0}"/>
               </a:ext>
             </a:extLst>
           </p:cNvPr>
@@ -2723,6 +2732,7 @@
           <a:lstStyle xmlns:a="http://schemas.openxmlformats.org/drawingml/2006/main"/>
           <a:p xmlns:a="http://schemas.openxmlformats.org/drawingml/2006/main">
             <a:pPr algn="l">
+              <a:buNone/>
               <a:defRPr sz="1350" b="0">
                 <a:solidFill>
                   <a:srgbClr val="667085"/>
@@ -2751,7 +2761,7 @@
           <p:cNvPr id="6" name="stat-10-360">
             <a:extLst xmlns:a="http://schemas.openxmlformats.org/drawingml/2006/main">
               <a:ext uri="{FF2B5EF4-FFF2-40B4-BE49-F238E27FC236}">
-                <a16:creationId xmlns:a16="http://schemas.microsoft.com/office/drawing/2014/main" id="{5F8625C3-26DC-4D98-A60A-A4BB291BF242}"/>
+                <a16:creationId xmlns:a16="http://schemas.microsoft.com/office/drawing/2014/main" id="{D0DDBE3D-F87D-4934-ABA3-12382970F3E2}"/>
               </a:ext>
             </a:extLst>
           </p:cNvPr>
@@ -2781,6 +2791,7 @@
           <a:lstStyle xmlns:a="http://schemas.openxmlformats.org/drawingml/2006/main"/>
           <a:p xmlns:a="http://schemas.openxmlformats.org/drawingml/2006/main">
             <a:pPr algn="l">
+              <a:buNone/>
               <a:defRPr sz="3375" b="1">
                 <a:solidFill>
                   <a:srgbClr val="667085"/>
@@ -2809,7 +2820,7 @@
           <p:cNvPr id="7" name="stat-label-10-360">
             <a:extLst xmlns:a="http://schemas.openxmlformats.org/drawingml/2006/main">
               <a:ext uri="{FF2B5EF4-FFF2-40B4-BE49-F238E27FC236}">
-                <a16:creationId xmlns:a16="http://schemas.microsoft.com/office/drawing/2014/main" id="{6C4591DB-EEB1-4C6C-985E-619685740233}"/>
+                <a16:creationId xmlns:a16="http://schemas.microsoft.com/office/drawing/2014/main" id="{0743301D-705A-4D39-9716-17573529A7B2}"/>
               </a:ext>
             </a:extLst>
           </p:cNvPr>
@@ -2839,6 +2850,7 @@
           <a:lstStyle xmlns:a="http://schemas.openxmlformats.org/drawingml/2006/main"/>
           <a:p xmlns:a="http://schemas.openxmlformats.org/drawingml/2006/main">
             <a:pPr algn="l">
+              <a:buNone/>
               <a:defRPr sz="1350" b="0">
                 <a:solidFill>
                   <a:srgbClr val="667085"/>
@@ -2867,7 +2879,7 @@
           <p:cNvPr id="8" name="takeaway-10">
             <a:extLst xmlns:a="http://schemas.openxmlformats.org/drawingml/2006/main">
               <a:ext uri="{FF2B5EF4-FFF2-40B4-BE49-F238E27FC236}">
-                <a16:creationId xmlns:a16="http://schemas.microsoft.com/office/drawing/2014/main" id="{F8C52DC6-F5C9-4755-B33D-CA508F481684}"/>
+                <a16:creationId xmlns:a16="http://schemas.microsoft.com/office/drawing/2014/main" id="{92202A1D-0673-47C1-B140-3F0DF9C30C43}"/>
               </a:ext>
             </a:extLst>
           </p:cNvPr>
@@ -2897,6 +2909,7 @@
           <a:lstStyle xmlns:a="http://schemas.openxmlformats.org/drawingml/2006/main"/>
           <a:p xmlns:a="http://schemas.openxmlformats.org/drawingml/2006/main">
             <a:pPr algn="l">
+              <a:buNone/>
               <a:defRPr sz="1425" b="0">
                 <a:solidFill>
                   <a:srgbClr val="172033"/>
@@ -2925,7 +2938,7 @@
           <p:cNvPr id="9" name="source-10">
             <a:extLst xmlns:a="http://schemas.openxmlformats.org/drawingml/2006/main">
               <a:ext uri="{FF2B5EF4-FFF2-40B4-BE49-F238E27FC236}">
-                <a16:creationId xmlns:a16="http://schemas.microsoft.com/office/drawing/2014/main" id="{47FFCBA8-FFBB-41FE-B7E0-5E90BE998174}"/>
+                <a16:creationId xmlns:a16="http://schemas.microsoft.com/office/drawing/2014/main" id="{524F64E0-DE68-489D-9A7C-B32B3B1B35E9}"/>
               </a:ext>
             </a:extLst>
           </p:cNvPr>
@@ -2955,6 +2968,7 @@
           <a:lstStyle xmlns:a="http://schemas.openxmlformats.org/drawingml/2006/main"/>
           <a:p xmlns:a="http://schemas.openxmlformats.org/drawingml/2006/main">
             <a:pPr algn="l">
+              <a:buNone/>
               <a:defRPr sz="825" b="0">
                 <a:solidFill>
                   <a:srgbClr val="667085"/>
@@ -2983,7 +2997,7 @@
           <p:cNvPr id="10" name="page-10">
             <a:extLst xmlns:a="http://schemas.openxmlformats.org/drawingml/2006/main">
               <a:ext uri="{FF2B5EF4-FFF2-40B4-BE49-F238E27FC236}">
-                <a16:creationId xmlns:a16="http://schemas.microsoft.com/office/drawing/2014/main" id="{0B242025-4570-4681-8952-66C38ED67DFD}"/>
+                <a16:creationId xmlns:a16="http://schemas.microsoft.com/office/drawing/2014/main" id="{6FC925D5-E534-49C5-9E6E-989FF8256389}"/>
               </a:ext>
             </a:extLst>
           </p:cNvPr>
@@ -3013,6 +3027,7 @@
           <a:lstStyle xmlns:a="http://schemas.openxmlformats.org/drawingml/2006/main"/>
           <a:p xmlns:a="http://schemas.openxmlformats.org/drawingml/2006/main">
             <a:pPr algn="r">
+              <a:buNone/>
               <a:defRPr sz="900" b="0">
                 <a:solidFill>
                   <a:srgbClr val="667085"/>
@@ -3039,7 +3054,7 @@
     </p:spTree>
     <p:extLst>
       <p:ext uri="{BB962C8B-B14F-4D97-AF65-F5344CB8AC3E}">
-        <p14:creationId xmlns:p14="http://schemas.microsoft.com/office/powerpoint/2010/main" val="1752228979"/>
+        <p14:creationId xmlns:p14="http://schemas.microsoft.com/office/powerpoint/2010/main" val="639504959"/>
       </p:ext>
     </p:extLst>
   </p:cSld>
@@ -3070,7 +3085,7 @@
           <p:cNvPr id="1" name="title-11">
             <a:extLst xmlns:a="http://schemas.openxmlformats.org/drawingml/2006/main">
               <a:ext uri="{FF2B5EF4-FFF2-40B4-BE49-F238E27FC236}">
-                <a16:creationId xmlns:a16="http://schemas.microsoft.com/office/drawing/2014/main" id="{C73AE711-E8D9-43C7-A39E-85747D42C3D8}"/>
+                <a16:creationId xmlns:a16="http://schemas.microsoft.com/office/drawing/2014/main" id="{2ACB8BB3-753F-42D5-9654-6EF94087676E}"/>
               </a:ext>
             </a:extLst>
           </p:cNvPr>
@@ -3100,6 +3115,7 @@
           <a:lstStyle xmlns:a="http://schemas.openxmlformats.org/drawingml/2006/main"/>
           <a:p xmlns:a="http://schemas.openxmlformats.org/drawingml/2006/main">
             <a:pPr algn="l">
+              <a:buNone/>
               <a:defRPr sz="3375" b="1">
                 <a:solidFill>
                   <a:srgbClr val="172033"/>
@@ -3125,18 +3141,18 @@
       </p:sp>
       <p:pic>
         <p:nvPicPr>
-          <p:cNvPr id="10" name=""/>
+          <p:cNvPr id="12" name=""/>
           <p:cNvPicPr>
             <a:picLocks xmlns:a="http://schemas.openxmlformats.org/drawingml/2006/main" noChangeAspect="1"/>
           </p:cNvPicPr>
           <p:nvPr/>
         </p:nvPicPr>
         <p:blipFill>
-          <a:blip xmlns:r="http://schemas.openxmlformats.org/officeDocument/2006/relationships" xmlns:a="http://schemas.openxmlformats.org/drawingml/2006/main" r:embed="R6aa46fa096e841ab"/>
+          <a:blip xmlns:r="http://schemas.openxmlformats.org/officeDocument/2006/relationships" xmlns:a="http://schemas.openxmlformats.org/drawingml/2006/main" r:embed="R8b5b913bec65442a"/>
           <a:stretch xmlns:a="http://schemas.openxmlformats.org/drawingml/2006/main"/>
         </p:blipFill>
         <p:spPr>
-          <a:xfrm xmlns:a="http://schemas.openxmlformats.org/drawingml/2006/main">
+          <a:xfrm xmlns:a="http://schemas.openxmlformats.org/drawingml/2006/main" flipH="0" flipV="0">
             <a:off x="400050" y="1557338"/>
             <a:ext cx="5429250" cy="2352675"/>
           </a:xfrm>
@@ -3147,18 +3163,18 @@
       </p:pic>
       <p:pic>
         <p:nvPicPr>
-          <p:cNvPr id="11" name=""/>
+          <p:cNvPr id="13" name=""/>
           <p:cNvPicPr>
             <a:picLocks xmlns:a="http://schemas.openxmlformats.org/drawingml/2006/main" noChangeAspect="1"/>
           </p:cNvPicPr>
           <p:nvPr/>
         </p:nvPicPr>
         <p:blipFill>
-          <a:blip xmlns:r="http://schemas.openxmlformats.org/officeDocument/2006/relationships" xmlns:a="http://schemas.openxmlformats.org/drawingml/2006/main" r:embed="R8c8d0c19e24046f9"/>
+          <a:blip xmlns:r="http://schemas.openxmlformats.org/officeDocument/2006/relationships" xmlns:a="http://schemas.openxmlformats.org/drawingml/2006/main" r:embed="R23be1f91e123402f"/>
           <a:stretch xmlns:a="http://schemas.openxmlformats.org/drawingml/2006/main"/>
         </p:blipFill>
         <p:spPr>
-          <a:xfrm xmlns:a="http://schemas.openxmlformats.org/drawingml/2006/main">
+          <a:xfrm xmlns:a="http://schemas.openxmlformats.org/drawingml/2006/main" flipH="0" flipV="0">
             <a:off x="6362700" y="1557338"/>
             <a:ext cx="5429250" cy="2352675"/>
           </a:xfrm>
@@ -3172,7 +3188,7 @@
           <p:cNvPr id="4" name="dashboard-features">
             <a:extLst xmlns:a="http://schemas.openxmlformats.org/drawingml/2006/main">
               <a:ext uri="{FF2B5EF4-FFF2-40B4-BE49-F238E27FC236}">
-                <a16:creationId xmlns:a16="http://schemas.microsoft.com/office/drawing/2014/main" id="{A707D2B5-6AF6-4BDD-8467-65151DAFE7DF}"/>
+                <a16:creationId xmlns:a16="http://schemas.microsoft.com/office/drawing/2014/main" id="{21DA286E-0B75-464D-B3DB-95887DA091B7}"/>
               </a:ext>
             </a:extLst>
           </p:cNvPr>
@@ -3202,6 +3218,7 @@
           <a:lstStyle xmlns:a="http://schemas.openxmlformats.org/drawingml/2006/main"/>
           <a:p xmlns:a="http://schemas.openxmlformats.org/drawingml/2006/main">
             <a:pPr algn="l">
+              <a:buNone/>
               <a:defRPr sz="1650" b="1">
                 <a:solidFill>
                   <a:srgbClr val="172033"/>
@@ -3230,7 +3247,7 @@
           <p:cNvPr id="5" name="github-link">
             <a:extLst xmlns:a="http://schemas.openxmlformats.org/drawingml/2006/main">
               <a:ext uri="{FF2B5EF4-FFF2-40B4-BE49-F238E27FC236}">
-                <a16:creationId xmlns:a16="http://schemas.microsoft.com/office/drawing/2014/main" id="{86A8F817-EAD4-4AC2-8EB3-6C14830A6240}"/>
+                <a16:creationId xmlns:a16="http://schemas.microsoft.com/office/drawing/2014/main" id="{5C74DC02-6C08-4050-8AC5-6A0D6492BF41}"/>
               </a:ext>
             </a:extLst>
           </p:cNvPr>
@@ -3260,6 +3277,7 @@
           <a:lstStyle xmlns:a="http://schemas.openxmlformats.org/drawingml/2006/main"/>
           <a:p xmlns:a="http://schemas.openxmlformats.org/drawingml/2006/main">
             <a:pPr algn="l">
+              <a:buNone/>
               <a:defRPr sz="1350" b="0">
                 <a:solidFill>
                   <a:srgbClr val="0072B2"/>
@@ -3285,10 +3303,10 @@
       </p:sp>
       <p:sp>
         <p:nvSpPr>
-          <p:cNvPr id="6" name="dashboard-link-placeholder">
-            <a:extLst xmlns:a="http://schemas.openxmlformats.org/drawingml/2006/main">
-              <a:ext uri="{FF2B5EF4-FFF2-40B4-BE49-F238E27FC236}">
-                <a16:creationId xmlns:a16="http://schemas.microsoft.com/office/drawing/2014/main" id="{3F832954-A7E8-4D87-8517-6F6021F1FCE4}"/>
+          <p:cNvPr id="6" name="dashboard-link">
+            <a:extLst xmlns:a="http://schemas.openxmlformats.org/drawingml/2006/main">
+              <a:ext uri="{FF2B5EF4-FFF2-40B4-BE49-F238E27FC236}">
+                <a16:creationId xmlns:a16="http://schemas.microsoft.com/office/drawing/2014/main" id="{00D5EE3D-69E2-45F9-A0FE-2377866FFD26}"/>
               </a:ext>
             </a:extLst>
           </p:cNvPr>
@@ -3318,9 +3336,10 @@
           <a:lstStyle xmlns:a="http://schemas.openxmlformats.org/drawingml/2006/main"/>
           <a:p xmlns:a="http://schemas.openxmlformats.org/drawingml/2006/main">
             <a:pPr algn="l">
+              <a:buNone/>
               <a:defRPr sz="1350" b="0">
                 <a:solidFill>
-                  <a:srgbClr val="E69F00"/>
+                  <a:srgbClr val="0072B2"/>
                 </a:solidFill>
                 <a:latin typeface="Arial"/>
                 <a:ea typeface="Arial"/>
@@ -3330,13 +3349,13 @@
             <a:r>
               <a:rPr sz="1350" b="0">
                 <a:solidFill>
-                  <a:srgbClr val="E69F00"/>
-                </a:solidFill>
-                <a:latin typeface="Arial"/>
-                <a:ea typeface="Arial"/>
-                <a:cs typeface="Arial"/>
-              </a:rPr>
-              <a:t>Live dashboard: add Streamlit Community Cloud URL after deployment</a:t>
+                  <a:srgbClr val="0072B2"/>
+                </a:solidFill>
+                <a:latin typeface="Arial"/>
+                <a:ea typeface="Arial"/>
+                <a:cs typeface="Arial"/>
+              </a:rPr>
+              <a:t>Live dashboard: https://usaid-eu-ai-adoption-gap.streamlit.app/</a:t>
             </a:r>
           </a:p>
         </p:txBody>
@@ -3346,7 +3365,7 @@
           <p:cNvPr id="7" name="source-11">
             <a:extLst xmlns:a="http://schemas.openxmlformats.org/drawingml/2006/main">
               <a:ext uri="{FF2B5EF4-FFF2-40B4-BE49-F238E27FC236}">
-                <a16:creationId xmlns:a16="http://schemas.microsoft.com/office/drawing/2014/main" id="{B338C8D5-1161-489B-AAC8-FA60C87582FC}"/>
+                <a16:creationId xmlns:a16="http://schemas.microsoft.com/office/drawing/2014/main" id="{ABE36CAC-8C63-4FBA-85BE-9AC1BB36F72F}"/>
               </a:ext>
             </a:extLst>
           </p:cNvPr>
@@ -3376,6 +3395,7 @@
           <a:lstStyle xmlns:a="http://schemas.openxmlformats.org/drawingml/2006/main"/>
           <a:p xmlns:a="http://schemas.openxmlformats.org/drawingml/2006/main">
             <a:pPr algn="l">
+              <a:buNone/>
               <a:defRPr sz="825" b="0">
                 <a:solidFill>
                   <a:srgbClr val="667085"/>
@@ -3404,7 +3424,7 @@
           <p:cNvPr id="8" name="page-11">
             <a:extLst xmlns:a="http://schemas.openxmlformats.org/drawingml/2006/main">
               <a:ext uri="{FF2B5EF4-FFF2-40B4-BE49-F238E27FC236}">
-                <a16:creationId xmlns:a16="http://schemas.microsoft.com/office/drawing/2014/main" id="{327AD473-D54E-4483-A137-F978F547FCCF}"/>
+                <a16:creationId xmlns:a16="http://schemas.microsoft.com/office/drawing/2014/main" id="{79AF908E-8CB0-4860-83C7-A09C4EC2E3D8}"/>
               </a:ext>
             </a:extLst>
           </p:cNvPr>
@@ -3434,6 +3454,7 @@
           <a:lstStyle xmlns:a="http://schemas.openxmlformats.org/drawingml/2006/main"/>
           <a:p xmlns:a="http://schemas.openxmlformats.org/drawingml/2006/main">
             <a:pPr algn="r">
+              <a:buNone/>
               <a:defRPr sz="900" b="0">
                 <a:solidFill>
                   <a:srgbClr val="667085"/>
@@ -3460,7 +3481,7 @@
     </p:spTree>
     <p:extLst>
       <p:ext uri="{BB962C8B-B14F-4D97-AF65-F5344CB8AC3E}">
-        <p14:creationId xmlns:p14="http://schemas.microsoft.com/office/powerpoint/2010/main" val="1646479001"/>
+        <p14:creationId xmlns:p14="http://schemas.microsoft.com/office/powerpoint/2010/main" val="2031288820"/>
       </p:ext>
     </p:extLst>
   </p:cSld>
@@ -3484,7 +3505,7 @@
           <p:cNvPr id="1" name="Title-3-1">
             <a:extLst xmlns:a="http://schemas.openxmlformats.org/drawingml/2006/main">
               <a:ext uri="{FF2B5EF4-FFF2-40B4-BE49-F238E27FC236}">
-                <a16:creationId xmlns:a16="http://schemas.microsoft.com/office/drawing/2014/main" id="{22F7560D-F19E-4192-B628-958516E9F90D}"/>
+                <a16:creationId xmlns:a16="http://schemas.microsoft.com/office/drawing/2014/main" id="{159ABFF1-3602-4701-8A2C-C6C9453B45CE}"/>
               </a:ext>
             </a:extLst>
           </p:cNvPr>
@@ -3542,7 +3563,7 @@
           <p:cNvPr id="2" name="Subtitle-4-2">
             <a:extLst xmlns:a="http://schemas.openxmlformats.org/drawingml/2006/main">
               <a:ext uri="{FF2B5EF4-FFF2-40B4-BE49-F238E27FC236}">
-                <a16:creationId xmlns:a16="http://schemas.microsoft.com/office/drawing/2014/main" id="{A95D19FF-0E03-4B8E-A50A-7F171923F6F5}"/>
+                <a16:creationId xmlns:a16="http://schemas.microsoft.com/office/drawing/2014/main" id="{693989FC-1D81-484A-840A-BF9575210118}"/>
               </a:ext>
             </a:extLst>
           </p:cNvPr>
@@ -3653,7 +3674,7 @@
           <p:cNvPr id="3" name="Subtitle-4-3">
             <a:extLst xmlns:a="http://schemas.openxmlformats.org/drawingml/2006/main">
               <a:ext uri="{FF2B5EF4-FFF2-40B4-BE49-F238E27FC236}">
-                <a16:creationId xmlns:a16="http://schemas.microsoft.com/office/drawing/2014/main" id="{14A34AAB-D94B-4AEE-AE0D-CEBC4416F1A0}"/>
+                <a16:creationId xmlns:a16="http://schemas.microsoft.com/office/drawing/2014/main" id="{A4661A60-A670-4CEE-8418-4E7DC5F97273}"/>
               </a:ext>
             </a:extLst>
           </p:cNvPr>
@@ -3708,7 +3729,7 @@
     </p:spTree>
     <p:extLst>
       <p:ext uri="{BB962C8B-B14F-4D97-AF65-F5344CB8AC3E}">
-        <p14:creationId xmlns:p14="http://schemas.microsoft.com/office/powerpoint/2010/main" val="403939876"/>
+        <p14:creationId xmlns:p14="http://schemas.microsoft.com/office/powerpoint/2010/main" val="238521250"/>
       </p:ext>
     </p:extLst>
   </p:cSld>
@@ -3739,7 +3760,7 @@
           <p:cNvPr id="1" name="title-2">
             <a:extLst xmlns:a="http://schemas.openxmlformats.org/drawingml/2006/main">
               <a:ext uri="{FF2B5EF4-FFF2-40B4-BE49-F238E27FC236}">
-                <a16:creationId xmlns:a16="http://schemas.microsoft.com/office/drawing/2014/main" id="{7CBB518C-F9AA-49B2-89D7-A0ED4011CE0C}"/>
+                <a16:creationId xmlns:a16="http://schemas.microsoft.com/office/drawing/2014/main" id="{822FC001-7E46-4EA8-A9C3-B1572006CB09}"/>
               </a:ext>
             </a:extLst>
           </p:cNvPr>
@@ -3769,6 +3790,7 @@
           <a:lstStyle xmlns:a="http://schemas.openxmlformats.org/drawingml/2006/main"/>
           <a:p xmlns:a="http://schemas.openxmlformats.org/drawingml/2006/main">
             <a:pPr algn="l">
+              <a:buNone/>
               <a:defRPr sz="3525" b="1">
                 <a:solidFill>
                   <a:srgbClr val="172033"/>
@@ -3797,7 +3819,7 @@
           <p:cNvPr id="2" name="central-question">
             <a:extLst xmlns:a="http://schemas.openxmlformats.org/drawingml/2006/main">
               <a:ext uri="{FF2B5EF4-FFF2-40B4-BE49-F238E27FC236}">
-                <a16:creationId xmlns:a16="http://schemas.microsoft.com/office/drawing/2014/main" id="{EBA562C0-B672-4A4D-89DB-12BD28B6DDE6}"/>
+                <a16:creationId xmlns:a16="http://schemas.microsoft.com/office/drawing/2014/main" id="{96827DE7-C65B-408C-BE77-0D8C1F1B9362}"/>
               </a:ext>
             </a:extLst>
           </p:cNvPr>
@@ -3827,6 +3849,7 @@
           <a:lstStyle xmlns:a="http://schemas.openxmlformats.org/drawingml/2006/main"/>
           <a:p xmlns:a="http://schemas.openxmlformats.org/drawingml/2006/main">
             <a:pPr algn="l">
+              <a:buNone/>
               <a:defRPr sz="2325" b="1">
                 <a:solidFill>
                   <a:srgbClr val="172033"/>
@@ -3855,7 +3878,7 @@
           <p:cNvPr id="3" name="data-scope">
             <a:extLst xmlns:a="http://schemas.openxmlformats.org/drawingml/2006/main">
               <a:ext uri="{FF2B5EF4-FFF2-40B4-BE49-F238E27FC236}">
-                <a16:creationId xmlns:a16="http://schemas.microsoft.com/office/drawing/2014/main" id="{B179FE34-32A9-489B-9A9E-73FA1C6133DD}"/>
+                <a16:creationId xmlns:a16="http://schemas.microsoft.com/office/drawing/2014/main" id="{0A237911-ED4E-4BA8-8B28-CEE0747D442A}"/>
               </a:ext>
             </a:extLst>
           </p:cNvPr>
@@ -3885,6 +3908,7 @@
           <a:lstStyle xmlns:a="http://schemas.openxmlformats.org/drawingml/2006/main"/>
           <a:p xmlns:a="http://schemas.openxmlformats.org/drawingml/2006/main">
             <a:pPr algn="l">
+              <a:buNone/>
               <a:defRPr sz="1725" b="0">
                 <a:solidFill>
                   <a:srgbClr val="667085"/>
@@ -3908,6 +3932,7 @@
           </a:p>
           <a:p xmlns:a="http://schemas.openxmlformats.org/drawingml/2006/main">
             <a:pPr algn="l">
+              <a:buNone/>
               <a:defRPr sz="1725" b="0">
                 <a:solidFill>
                   <a:srgbClr val="667085"/>
@@ -3931,6 +3956,7 @@
           </a:p>
           <a:p xmlns:a="http://schemas.openxmlformats.org/drawingml/2006/main">
             <a:pPr algn="l">
+              <a:buNone/>
               <a:defRPr sz="1725" b="0">
                 <a:solidFill>
                   <a:srgbClr val="667085"/>
@@ -3954,6 +3980,7 @@
           </a:p>
           <a:p xmlns:a="http://schemas.openxmlformats.org/drawingml/2006/main">
             <a:pPr algn="l">
+              <a:buNone/>
               <a:defRPr sz="1725" b="0">
                 <a:solidFill>
                   <a:srgbClr val="667085"/>
@@ -3982,7 +4009,7 @@
           <p:cNvPr id="4" name="layer-number-01">
             <a:extLst xmlns:a="http://schemas.openxmlformats.org/drawingml/2006/main">
               <a:ext uri="{FF2B5EF4-FFF2-40B4-BE49-F238E27FC236}">
-                <a16:creationId xmlns:a16="http://schemas.microsoft.com/office/drawing/2014/main" id="{D3E4F7FB-DDB3-4DBB-9159-55991FA7BD9D}"/>
+                <a16:creationId xmlns:a16="http://schemas.microsoft.com/office/drawing/2014/main" id="{5AF40B2D-7101-4BD1-AF2F-8D669AE6AD02}"/>
               </a:ext>
             </a:extLst>
           </p:cNvPr>
@@ -4012,6 +4039,7 @@
           <a:lstStyle xmlns:a="http://schemas.openxmlformats.org/drawingml/2006/main"/>
           <a:p xmlns:a="http://schemas.openxmlformats.org/drawingml/2006/main">
             <a:pPr algn="l">
+              <a:buNone/>
               <a:defRPr sz="1500" b="1">
                 <a:solidFill>
                   <a:srgbClr val="0072B2"/>
@@ -4040,7 +4068,7 @@
           <p:cNvPr id="5" name="layer-label-01">
             <a:extLst xmlns:a="http://schemas.openxmlformats.org/drawingml/2006/main">
               <a:ext uri="{FF2B5EF4-FFF2-40B4-BE49-F238E27FC236}">
-                <a16:creationId xmlns:a16="http://schemas.microsoft.com/office/drawing/2014/main" id="{77A5321B-2451-4566-A065-CD9E2B30DB4E}"/>
+                <a16:creationId xmlns:a16="http://schemas.microsoft.com/office/drawing/2014/main" id="{BF6EAF76-35F6-42DF-8110-78919B960EBA}"/>
               </a:ext>
             </a:extLst>
           </p:cNvPr>
@@ -4070,6 +4098,7 @@
           <a:lstStyle xmlns:a="http://schemas.openxmlformats.org/drawingml/2006/main"/>
           <a:p xmlns:a="http://schemas.openxmlformats.org/drawingml/2006/main">
             <a:pPr algn="l">
+              <a:buNone/>
               <a:defRPr sz="1950" b="1">
                 <a:solidFill>
                   <a:srgbClr val="172033"/>
@@ -4098,7 +4127,7 @@
           <p:cNvPr id="6" name="layer-question-01">
             <a:extLst xmlns:a="http://schemas.openxmlformats.org/drawingml/2006/main">
               <a:ext uri="{FF2B5EF4-FFF2-40B4-BE49-F238E27FC236}">
-                <a16:creationId xmlns:a16="http://schemas.microsoft.com/office/drawing/2014/main" id="{0796A61C-4753-48F7-8DE8-2EFDF5A6A032}"/>
+                <a16:creationId xmlns:a16="http://schemas.microsoft.com/office/drawing/2014/main" id="{9F240A80-738E-4600-A997-D6AB927C6EC6}"/>
               </a:ext>
             </a:extLst>
           </p:cNvPr>
@@ -4128,6 +4157,7 @@
           <a:lstStyle xmlns:a="http://schemas.openxmlformats.org/drawingml/2006/main"/>
           <a:p xmlns:a="http://schemas.openxmlformats.org/drawingml/2006/main">
             <a:pPr algn="l">
+              <a:buNone/>
               <a:defRPr sz="1350" b="0">
                 <a:solidFill>
                   <a:srgbClr val="667085"/>
@@ -4156,7 +4186,7 @@
           <p:cNvPr id="7" name="layer-number-02">
             <a:extLst xmlns:a="http://schemas.openxmlformats.org/drawingml/2006/main">
               <a:ext uri="{FF2B5EF4-FFF2-40B4-BE49-F238E27FC236}">
-                <a16:creationId xmlns:a16="http://schemas.microsoft.com/office/drawing/2014/main" id="{FE4221E5-87D2-42AA-B341-AFA07E2F6ABF}"/>
+                <a16:creationId xmlns:a16="http://schemas.microsoft.com/office/drawing/2014/main" id="{3507E10F-36A1-4796-869D-CACCEA4395C0}"/>
               </a:ext>
             </a:extLst>
           </p:cNvPr>
@@ -4186,6 +4216,7 @@
           <a:lstStyle xmlns:a="http://schemas.openxmlformats.org/drawingml/2006/main"/>
           <a:p xmlns:a="http://schemas.openxmlformats.org/drawingml/2006/main">
             <a:pPr algn="l">
+              <a:buNone/>
               <a:defRPr sz="1500" b="1">
                 <a:solidFill>
                   <a:srgbClr val="0072B2"/>
@@ -4214,7 +4245,7 @@
           <p:cNvPr id="8" name="layer-label-02">
             <a:extLst xmlns:a="http://schemas.openxmlformats.org/drawingml/2006/main">
               <a:ext uri="{FF2B5EF4-FFF2-40B4-BE49-F238E27FC236}">
-                <a16:creationId xmlns:a16="http://schemas.microsoft.com/office/drawing/2014/main" id="{5F2120C5-D13A-4512-92CF-83B49D5A7FDF}"/>
+                <a16:creationId xmlns:a16="http://schemas.microsoft.com/office/drawing/2014/main" id="{46995FE9-DE34-4AC1-B978-0E55D1EA71CC}"/>
               </a:ext>
             </a:extLst>
           </p:cNvPr>
@@ -4244,6 +4275,7 @@
           <a:lstStyle xmlns:a="http://schemas.openxmlformats.org/drawingml/2006/main"/>
           <a:p xmlns:a="http://schemas.openxmlformats.org/drawingml/2006/main">
             <a:pPr algn="l">
+              <a:buNone/>
               <a:defRPr sz="1950" b="1">
                 <a:solidFill>
                   <a:srgbClr val="172033"/>
@@ -4272,7 +4304,7 @@
           <p:cNvPr id="9" name="layer-question-02">
             <a:extLst xmlns:a="http://schemas.openxmlformats.org/drawingml/2006/main">
               <a:ext uri="{FF2B5EF4-FFF2-40B4-BE49-F238E27FC236}">
-                <a16:creationId xmlns:a16="http://schemas.microsoft.com/office/drawing/2014/main" id="{5233296C-32AD-44BA-AB6C-64BF4B9DB3AA}"/>
+                <a16:creationId xmlns:a16="http://schemas.microsoft.com/office/drawing/2014/main" id="{791618ED-CE7D-46CF-B9C4-E3495B8CB4E6}"/>
               </a:ext>
             </a:extLst>
           </p:cNvPr>
@@ -4302,6 +4334,7 @@
           <a:lstStyle xmlns:a="http://schemas.openxmlformats.org/drawingml/2006/main"/>
           <a:p xmlns:a="http://schemas.openxmlformats.org/drawingml/2006/main">
             <a:pPr algn="l">
+              <a:buNone/>
               <a:defRPr sz="1350" b="0">
                 <a:solidFill>
                   <a:srgbClr val="667085"/>
@@ -4330,7 +4363,7 @@
           <p:cNvPr id="10" name="layer-number-03">
             <a:extLst xmlns:a="http://schemas.openxmlformats.org/drawingml/2006/main">
               <a:ext uri="{FF2B5EF4-FFF2-40B4-BE49-F238E27FC236}">
-                <a16:creationId xmlns:a16="http://schemas.microsoft.com/office/drawing/2014/main" id="{07A7C1C0-5571-4716-831D-BEC56AAC0CF7}"/>
+                <a16:creationId xmlns:a16="http://schemas.microsoft.com/office/drawing/2014/main" id="{53879FC9-425D-4E56-B516-D49E9464F2B1}"/>
               </a:ext>
             </a:extLst>
           </p:cNvPr>
@@ -4360,6 +4393,7 @@
           <a:lstStyle xmlns:a="http://schemas.openxmlformats.org/drawingml/2006/main"/>
           <a:p xmlns:a="http://schemas.openxmlformats.org/drawingml/2006/main">
             <a:pPr algn="l">
+              <a:buNone/>
               <a:defRPr sz="1500" b="1">
                 <a:solidFill>
                   <a:srgbClr val="0072B2"/>
@@ -4388,7 +4422,7 @@
           <p:cNvPr id="11" name="layer-label-03">
             <a:extLst xmlns:a="http://schemas.openxmlformats.org/drawingml/2006/main">
               <a:ext uri="{FF2B5EF4-FFF2-40B4-BE49-F238E27FC236}">
-                <a16:creationId xmlns:a16="http://schemas.microsoft.com/office/drawing/2014/main" id="{08E72D8A-8F03-4F2C-BC3E-470FB10DA2F4}"/>
+                <a16:creationId xmlns:a16="http://schemas.microsoft.com/office/drawing/2014/main" id="{D087B8FE-3DC8-40C9-A42C-ADFC33611F7A}"/>
               </a:ext>
             </a:extLst>
           </p:cNvPr>
@@ -4418,6 +4452,7 @@
           <a:lstStyle xmlns:a="http://schemas.openxmlformats.org/drawingml/2006/main"/>
           <a:p xmlns:a="http://schemas.openxmlformats.org/drawingml/2006/main">
             <a:pPr algn="l">
+              <a:buNone/>
               <a:defRPr sz="1950" b="1">
                 <a:solidFill>
                   <a:srgbClr val="172033"/>
@@ -4446,7 +4481,7 @@
           <p:cNvPr id="12" name="layer-question-03">
             <a:extLst xmlns:a="http://schemas.openxmlformats.org/drawingml/2006/main">
               <a:ext uri="{FF2B5EF4-FFF2-40B4-BE49-F238E27FC236}">
-                <a16:creationId xmlns:a16="http://schemas.microsoft.com/office/drawing/2014/main" id="{7E6CD6C3-B2A5-49B2-91C7-55764EA88957}"/>
+                <a16:creationId xmlns:a16="http://schemas.microsoft.com/office/drawing/2014/main" id="{4E4D61B6-0399-4405-8AFF-6B2CB28FD3E8}"/>
               </a:ext>
             </a:extLst>
           </p:cNvPr>
@@ -4476,6 +4511,7 @@
           <a:lstStyle xmlns:a="http://schemas.openxmlformats.org/drawingml/2006/main"/>
           <a:p xmlns:a="http://schemas.openxmlformats.org/drawingml/2006/main">
             <a:pPr algn="l">
+              <a:buNone/>
               <a:defRPr sz="1350" b="0">
                 <a:solidFill>
                   <a:srgbClr val="667085"/>
@@ -4504,7 +4540,7 @@
           <p:cNvPr id="13" name="layer-number-04">
             <a:extLst xmlns:a="http://schemas.openxmlformats.org/drawingml/2006/main">
               <a:ext uri="{FF2B5EF4-FFF2-40B4-BE49-F238E27FC236}">
-                <a16:creationId xmlns:a16="http://schemas.microsoft.com/office/drawing/2014/main" id="{68B43EEE-9D72-45A2-85E6-84AB35B7900E}"/>
+                <a16:creationId xmlns:a16="http://schemas.microsoft.com/office/drawing/2014/main" id="{F18B7950-EF15-44C3-8019-1786F599862B}"/>
               </a:ext>
             </a:extLst>
           </p:cNvPr>
@@ -4534,6 +4570,7 @@
           <a:lstStyle xmlns:a="http://schemas.openxmlformats.org/drawingml/2006/main"/>
           <a:p xmlns:a="http://schemas.openxmlformats.org/drawingml/2006/main">
             <a:pPr algn="l">
+              <a:buNone/>
               <a:defRPr sz="1500" b="1">
                 <a:solidFill>
                   <a:srgbClr val="0072B2"/>
@@ -4562,7 +4599,7 @@
           <p:cNvPr id="14" name="layer-label-04">
             <a:extLst xmlns:a="http://schemas.openxmlformats.org/drawingml/2006/main">
               <a:ext uri="{FF2B5EF4-FFF2-40B4-BE49-F238E27FC236}">
-                <a16:creationId xmlns:a16="http://schemas.microsoft.com/office/drawing/2014/main" id="{82BDEDFA-89DB-4346-A185-23C19BB8A352}"/>
+                <a16:creationId xmlns:a16="http://schemas.microsoft.com/office/drawing/2014/main" id="{0EC6C937-DB18-496B-9456-6DD54D9FCB86}"/>
               </a:ext>
             </a:extLst>
           </p:cNvPr>
@@ -4592,6 +4629,7 @@
           <a:lstStyle xmlns:a="http://schemas.openxmlformats.org/drawingml/2006/main"/>
           <a:p xmlns:a="http://schemas.openxmlformats.org/drawingml/2006/main">
             <a:pPr algn="l">
+              <a:buNone/>
               <a:defRPr sz="1950" b="1">
                 <a:solidFill>
                   <a:srgbClr val="172033"/>
@@ -4620,7 +4658,7 @@
           <p:cNvPr id="15" name="layer-question-04">
             <a:extLst xmlns:a="http://schemas.openxmlformats.org/drawingml/2006/main">
               <a:ext uri="{FF2B5EF4-FFF2-40B4-BE49-F238E27FC236}">
-                <a16:creationId xmlns:a16="http://schemas.microsoft.com/office/drawing/2014/main" id="{6749976B-74D0-4934-8B91-7B12BB9CF63C}"/>
+                <a16:creationId xmlns:a16="http://schemas.microsoft.com/office/drawing/2014/main" id="{6EFF06B3-EA61-40E5-AB0D-502DD07FC5D5}"/>
               </a:ext>
             </a:extLst>
           </p:cNvPr>
@@ -4650,6 +4688,7 @@
           <a:lstStyle xmlns:a="http://schemas.openxmlformats.org/drawingml/2006/main"/>
           <a:p xmlns:a="http://schemas.openxmlformats.org/drawingml/2006/main">
             <a:pPr algn="l">
+              <a:buNone/>
               <a:defRPr sz="1350" b="0">
                 <a:solidFill>
                   <a:srgbClr val="667085"/>
@@ -4678,7 +4717,7 @@
           <p:cNvPr id="16" name="source-2">
             <a:extLst xmlns:a="http://schemas.openxmlformats.org/drawingml/2006/main">
               <a:ext uri="{FF2B5EF4-FFF2-40B4-BE49-F238E27FC236}">
-                <a16:creationId xmlns:a16="http://schemas.microsoft.com/office/drawing/2014/main" id="{6B365421-9DA8-4211-80E3-9534688A0EAD}"/>
+                <a16:creationId xmlns:a16="http://schemas.microsoft.com/office/drawing/2014/main" id="{21472809-0501-4A49-8204-81E309CBC839}"/>
               </a:ext>
             </a:extLst>
           </p:cNvPr>
@@ -4708,6 +4747,7 @@
           <a:lstStyle xmlns:a="http://schemas.openxmlformats.org/drawingml/2006/main"/>
           <a:p xmlns:a="http://schemas.openxmlformats.org/drawingml/2006/main">
             <a:pPr algn="l">
+              <a:buNone/>
               <a:defRPr sz="825" b="0">
                 <a:solidFill>
                   <a:srgbClr val="667085"/>
@@ -4736,7 +4776,7 @@
           <p:cNvPr id="17" name="page-2">
             <a:extLst xmlns:a="http://schemas.openxmlformats.org/drawingml/2006/main">
               <a:ext uri="{FF2B5EF4-FFF2-40B4-BE49-F238E27FC236}">
-                <a16:creationId xmlns:a16="http://schemas.microsoft.com/office/drawing/2014/main" id="{6A45616A-5129-4534-BB82-4982BB937BC2}"/>
+                <a16:creationId xmlns:a16="http://schemas.microsoft.com/office/drawing/2014/main" id="{566ADE0C-8758-4FD3-8002-37378AB518F7}"/>
               </a:ext>
             </a:extLst>
           </p:cNvPr>
@@ -4766,6 +4806,7 @@
           <a:lstStyle xmlns:a="http://schemas.openxmlformats.org/drawingml/2006/main"/>
           <a:p xmlns:a="http://schemas.openxmlformats.org/drawingml/2006/main">
             <a:pPr algn="r">
+              <a:buNone/>
               <a:defRPr sz="900" b="0">
                 <a:solidFill>
                   <a:srgbClr val="667085"/>
@@ -4792,7 +4833,7 @@
     </p:spTree>
     <p:extLst>
       <p:ext uri="{BB962C8B-B14F-4D97-AF65-F5344CB8AC3E}">
-        <p14:creationId xmlns:p14="http://schemas.microsoft.com/office/powerpoint/2010/main" val="1505228536"/>
+        <p14:creationId xmlns:p14="http://schemas.microsoft.com/office/powerpoint/2010/main" val="1103654438"/>
       </p:ext>
     </p:extLst>
   </p:cSld>
@@ -4816,7 +4857,7 @@
           <p:cNvPr id="1" name="Rounded-Rectangle-5-1">
             <a:extLst xmlns:a="http://schemas.openxmlformats.org/drawingml/2006/main">
               <a:ext uri="{FF2B5EF4-FFF2-40B4-BE49-F238E27FC236}">
-                <a16:creationId xmlns:a16="http://schemas.microsoft.com/office/drawing/2014/main" id="{528A17E8-DB9B-40ED-BEA9-B6066D728B77}"/>
+                <a16:creationId xmlns:a16="http://schemas.microsoft.com/office/drawing/2014/main" id="{3CA6E47B-B656-4AEE-A814-29CF2753C7F9}"/>
               </a:ext>
             </a:extLst>
           </p:cNvPr>
@@ -4845,7 +4886,7 @@
           <p:cNvPr id="2" name="Rounded-Rectangle-6-2">
             <a:extLst xmlns:a="http://schemas.openxmlformats.org/drawingml/2006/main">
               <a:ext uri="{FF2B5EF4-FFF2-40B4-BE49-F238E27FC236}">
-                <a16:creationId xmlns:a16="http://schemas.microsoft.com/office/drawing/2014/main" id="{C7346464-C05B-4123-8C42-3288D3C485F2}"/>
+                <a16:creationId xmlns:a16="http://schemas.microsoft.com/office/drawing/2014/main" id="{7A6DB741-6650-4C70-A71A-F1E2FF3BE7FD}"/>
               </a:ext>
             </a:extLst>
           </p:cNvPr>
@@ -4874,7 +4915,7 @@
           <p:cNvPr id="3" name="Rounded-Rectangle-7-3">
             <a:extLst xmlns:a="http://schemas.openxmlformats.org/drawingml/2006/main">
               <a:ext uri="{FF2B5EF4-FFF2-40B4-BE49-F238E27FC236}">
-                <a16:creationId xmlns:a16="http://schemas.microsoft.com/office/drawing/2014/main" id="{5870438F-AD96-47F8-839E-30BE33A0A6B2}"/>
+                <a16:creationId xmlns:a16="http://schemas.microsoft.com/office/drawing/2014/main" id="{7A5CCC56-DF75-4EED-84E7-DFAE75B3FB87}"/>
               </a:ext>
             </a:extLst>
           </p:cNvPr>
@@ -4903,7 +4944,7 @@
           <p:cNvPr id="4" name="Slide-Number-Placeholder-1-4">
             <a:extLst xmlns:a="http://schemas.openxmlformats.org/drawingml/2006/main">
               <a:ext uri="{FF2B5EF4-FFF2-40B4-BE49-F238E27FC236}">
-                <a16:creationId xmlns:a16="http://schemas.microsoft.com/office/drawing/2014/main" id="{2937A471-A148-44FD-97FA-6B2A9747B5F1}"/>
+                <a16:creationId xmlns:a16="http://schemas.microsoft.com/office/drawing/2014/main" id="{C92C30CC-0547-4039-9021-74926154061D}"/>
               </a:ext>
             </a:extLst>
           </p:cNvPr>
@@ -4926,6 +4967,7 @@
           <a:lstStyle xmlns:a="http://schemas.openxmlformats.org/drawingml/2006/main"/>
           <a:p xmlns:a="http://schemas.openxmlformats.org/drawingml/2006/main">
             <a:pPr algn="r">
+              <a:buNone/>
               <a:defRPr sz="1000">
                 <a:solidFill>
                   <a:srgbClr val="000000"/>
@@ -4946,7 +4988,7 @@
           <p:cNvPr id="5" name="Title-2-5">
             <a:extLst xmlns:a="http://schemas.openxmlformats.org/drawingml/2006/main">
               <a:ext uri="{FF2B5EF4-FFF2-40B4-BE49-F238E27FC236}">
-                <a16:creationId xmlns:a16="http://schemas.microsoft.com/office/drawing/2014/main" id="{F716C0D8-1B63-49B8-B30A-FAC7B8E07698}"/>
+                <a16:creationId xmlns:a16="http://schemas.microsoft.com/office/drawing/2014/main" id="{B0B7A866-A0DD-4078-B236-C2C3C3214433}"/>
               </a:ext>
             </a:extLst>
           </p:cNvPr>
@@ -5003,7 +5045,7 @@
           <p:cNvPr id="6" name="Content-Placeholder-9-6">
             <a:extLst xmlns:a="http://schemas.openxmlformats.org/drawingml/2006/main">
               <a:ext uri="{FF2B5EF4-FFF2-40B4-BE49-F238E27FC236}">
-                <a16:creationId xmlns:a16="http://schemas.microsoft.com/office/drawing/2014/main" id="{9D66D099-9704-4F75-AC02-7034456D9BED}"/>
+                <a16:creationId xmlns:a16="http://schemas.microsoft.com/office/drawing/2014/main" id="{CFD50CF3-4E97-40C7-8770-886C3C328ECB}"/>
               </a:ext>
             </a:extLst>
           </p:cNvPr>
@@ -5060,7 +5102,7 @@
           <p:cNvPr id="7" name="Content-Placeholder-10-7">
             <a:extLst xmlns:a="http://schemas.openxmlformats.org/drawingml/2006/main">
               <a:ext uri="{FF2B5EF4-FFF2-40B4-BE49-F238E27FC236}">
-                <a16:creationId xmlns:a16="http://schemas.microsoft.com/office/drawing/2014/main" id="{170C8AF5-A4B6-43F9-B2A6-4628DD37D974}"/>
+                <a16:creationId xmlns:a16="http://schemas.microsoft.com/office/drawing/2014/main" id="{4C3CC339-B129-43A0-B291-F0FE9340289E}"/>
               </a:ext>
             </a:extLst>
           </p:cNvPr>
@@ -5117,7 +5159,7 @@
           <p:cNvPr id="8" name="Content-Placeholder-11-8">
             <a:extLst xmlns:a="http://schemas.openxmlformats.org/drawingml/2006/main">
               <a:ext uri="{FF2B5EF4-FFF2-40B4-BE49-F238E27FC236}">
-                <a16:creationId xmlns:a16="http://schemas.microsoft.com/office/drawing/2014/main" id="{D8AE63D2-7FDB-49F7-9290-AD83C12168D2}"/>
+                <a16:creationId xmlns:a16="http://schemas.microsoft.com/office/drawing/2014/main" id="{196E76AD-93BF-4248-97FB-DCE00BE631A2}"/>
               </a:ext>
             </a:extLst>
           </p:cNvPr>
@@ -5174,7 +5216,7 @@
           <p:cNvPr id="9" name="Content-Placeholder-9-9">
             <a:extLst xmlns:a="http://schemas.openxmlformats.org/drawingml/2006/main">
               <a:ext uri="{FF2B5EF4-FFF2-40B4-BE49-F238E27FC236}">
-                <a16:creationId xmlns:a16="http://schemas.microsoft.com/office/drawing/2014/main" id="{9D83F080-DD8D-47FF-A755-F0A728034740}"/>
+                <a16:creationId xmlns:a16="http://schemas.microsoft.com/office/drawing/2014/main" id="{37D7C151-1793-4EC8-86CF-8D0848AA3BBB}"/>
               </a:ext>
             </a:extLst>
           </p:cNvPr>
@@ -5231,7 +5273,7 @@
           <p:cNvPr id="10" name="Content-Placeholder-9-10">
             <a:extLst xmlns:a="http://schemas.openxmlformats.org/drawingml/2006/main">
               <a:ext uri="{FF2B5EF4-FFF2-40B4-BE49-F238E27FC236}">
-                <a16:creationId xmlns:a16="http://schemas.microsoft.com/office/drawing/2014/main" id="{C982B01F-E72D-49ED-8B6D-64F544A812B6}"/>
+                <a16:creationId xmlns:a16="http://schemas.microsoft.com/office/drawing/2014/main" id="{0DF0004C-0BEF-4015-9A16-E07D34317079}"/>
               </a:ext>
             </a:extLst>
           </p:cNvPr>
@@ -5288,7 +5330,7 @@
           <p:cNvPr id="11" name="Content-Placeholder-9-11">
             <a:extLst xmlns:a="http://schemas.openxmlformats.org/drawingml/2006/main">
               <a:ext uri="{FF2B5EF4-FFF2-40B4-BE49-F238E27FC236}">
-                <a16:creationId xmlns:a16="http://schemas.microsoft.com/office/drawing/2014/main" id="{4D41ADD6-7D0F-4098-AF55-E0A7D8A85828}"/>
+                <a16:creationId xmlns:a16="http://schemas.microsoft.com/office/drawing/2014/main" id="{BE8493A3-5E70-4020-B7E8-F7D6F9D343F4}"/>
               </a:ext>
             </a:extLst>
           </p:cNvPr>
@@ -5345,7 +5387,7 @@
           <p:cNvPr id="12" name="Content-Placeholder-15-12">
             <a:extLst xmlns:a="http://schemas.openxmlformats.org/drawingml/2006/main">
               <a:ext uri="{FF2B5EF4-FFF2-40B4-BE49-F238E27FC236}">
-                <a16:creationId xmlns:a16="http://schemas.microsoft.com/office/drawing/2014/main" id="{9E50367E-BF18-4F82-8BB5-498E3E658CC8}"/>
+                <a16:creationId xmlns:a16="http://schemas.microsoft.com/office/drawing/2014/main" id="{C82D0FD7-6CBE-4A94-AA58-25F156D9C123}"/>
               </a:ext>
             </a:extLst>
           </p:cNvPr>
@@ -5427,7 +5469,7 @@
     </p:spTree>
     <p:extLst>
       <p:ext uri="{BB962C8B-B14F-4D97-AF65-F5344CB8AC3E}">
-        <p14:creationId xmlns:p14="http://schemas.microsoft.com/office/powerpoint/2010/main" val="2113152520"/>
+        <p14:creationId xmlns:p14="http://schemas.microsoft.com/office/powerpoint/2010/main" val="1593380268"/>
       </p:ext>
     </p:extLst>
   </p:cSld>
@@ -5458,7 +5500,7 @@
           <p:cNvPr id="1" name="title-4">
             <a:extLst xmlns:a="http://schemas.openxmlformats.org/drawingml/2006/main">
               <a:ext uri="{FF2B5EF4-FFF2-40B4-BE49-F238E27FC236}">
-                <a16:creationId xmlns:a16="http://schemas.microsoft.com/office/drawing/2014/main" id="{B9F67288-C8AF-4C64-9FDB-2DCE0916853E}"/>
+                <a16:creationId xmlns:a16="http://schemas.microsoft.com/office/drawing/2014/main" id="{AA2464BE-14D3-4F06-B09C-C70B26F3704C}"/>
               </a:ext>
             </a:extLst>
           </p:cNvPr>
@@ -5488,6 +5530,7 @@
           <a:lstStyle xmlns:a="http://schemas.openxmlformats.org/drawingml/2006/main"/>
           <a:p xmlns:a="http://schemas.openxmlformats.org/drawingml/2006/main">
             <a:pPr algn="l">
+              <a:buNone/>
               <a:defRPr sz="3525" b="1">
                 <a:solidFill>
                   <a:srgbClr val="172033"/>
@@ -5513,18 +5556,18 @@
       </p:sp>
       <p:pic>
         <p:nvPicPr>
-          <p:cNvPr id="12" name=""/>
+          <p:cNvPr id="13" name=""/>
           <p:cNvPicPr>
             <a:picLocks xmlns:a="http://schemas.openxmlformats.org/drawingml/2006/main" noChangeAspect="1"/>
           </p:cNvPicPr>
           <p:nvPr/>
         </p:nvPicPr>
         <p:blipFill>
-          <a:blip xmlns:r="http://schemas.openxmlformats.org/officeDocument/2006/relationships" xmlns:a="http://schemas.openxmlformats.org/drawingml/2006/main" r:embed="Rb1bd6e3526c84822"/>
+          <a:blip xmlns:r="http://schemas.openxmlformats.org/officeDocument/2006/relationships" xmlns:a="http://schemas.openxmlformats.org/drawingml/2006/main" r:embed="R3a4debed2a3c4231"/>
           <a:stretch xmlns:a="http://schemas.openxmlformats.org/drawingml/2006/main"/>
         </p:blipFill>
         <p:spPr>
-          <a:xfrm xmlns:a="http://schemas.openxmlformats.org/drawingml/2006/main">
+          <a:xfrm xmlns:a="http://schemas.openxmlformats.org/drawingml/2006/main" flipH="0" flipV="0">
             <a:off x="400050" y="1993900"/>
             <a:ext cx="7810500" cy="3384550"/>
           </a:xfrm>
@@ -5538,7 +5581,7 @@
           <p:cNvPr id="3" name="rail-header-4">
             <a:extLst xmlns:a="http://schemas.openxmlformats.org/drawingml/2006/main">
               <a:ext uri="{FF2B5EF4-FFF2-40B4-BE49-F238E27FC236}">
-                <a16:creationId xmlns:a16="http://schemas.microsoft.com/office/drawing/2014/main" id="{02F9D914-AC22-411F-9DEA-9DA306845CF8}"/>
+                <a16:creationId xmlns:a16="http://schemas.microsoft.com/office/drawing/2014/main" id="{EA631D5D-92FE-44F9-A62E-51F881DD5525}"/>
               </a:ext>
             </a:extLst>
           </p:cNvPr>
@@ -5568,6 +5611,7 @@
           <a:lstStyle xmlns:a="http://schemas.openxmlformats.org/drawingml/2006/main"/>
           <a:p xmlns:a="http://schemas.openxmlformats.org/drawingml/2006/main">
             <a:pPr algn="l">
+              <a:buNone/>
               <a:defRPr sz="1800" b="1">
                 <a:solidFill>
                   <a:srgbClr val="172033"/>
@@ -5596,7 +5640,7 @@
           <p:cNvPr id="4" name="stat-4-218">
             <a:extLst xmlns:a="http://schemas.openxmlformats.org/drawingml/2006/main">
               <a:ext uri="{FF2B5EF4-FFF2-40B4-BE49-F238E27FC236}">
-                <a16:creationId xmlns:a16="http://schemas.microsoft.com/office/drawing/2014/main" id="{262B2B79-FCBF-4D8B-869E-CF175E4705D7}"/>
+                <a16:creationId xmlns:a16="http://schemas.microsoft.com/office/drawing/2014/main" id="{07DD4642-D7E0-47C4-9119-81A79988EDE0}"/>
               </a:ext>
             </a:extLst>
           </p:cNvPr>
@@ -5626,6 +5670,7 @@
           <a:lstStyle xmlns:a="http://schemas.openxmlformats.org/drawingml/2006/main"/>
           <a:p xmlns:a="http://schemas.openxmlformats.org/drawingml/2006/main">
             <a:pPr algn="l">
+              <a:buNone/>
               <a:defRPr sz="3375" b="1">
                 <a:solidFill>
                   <a:srgbClr val="D55E00"/>
@@ -5654,7 +5699,7 @@
           <p:cNvPr id="5" name="stat-label-4-218">
             <a:extLst xmlns:a="http://schemas.openxmlformats.org/drawingml/2006/main">
               <a:ext uri="{FF2B5EF4-FFF2-40B4-BE49-F238E27FC236}">
-                <a16:creationId xmlns:a16="http://schemas.microsoft.com/office/drawing/2014/main" id="{30FA81D1-E0B8-4D60-9F20-904FD8E1D262}"/>
+                <a16:creationId xmlns:a16="http://schemas.microsoft.com/office/drawing/2014/main" id="{86C0D7A2-CFF7-4D2D-AC63-BD2FD1360914}"/>
               </a:ext>
             </a:extLst>
           </p:cNvPr>
@@ -5684,6 +5729,7 @@
           <a:lstStyle xmlns:a="http://schemas.openxmlformats.org/drawingml/2006/main"/>
           <a:p xmlns:a="http://schemas.openxmlformats.org/drawingml/2006/main">
             <a:pPr algn="l">
+              <a:buNone/>
               <a:defRPr sz="1350" b="0">
                 <a:solidFill>
                   <a:srgbClr val="667085"/>
@@ -5712,7 +5758,7 @@
           <p:cNvPr id="6" name="stat-4-360">
             <a:extLst xmlns:a="http://schemas.openxmlformats.org/drawingml/2006/main">
               <a:ext uri="{FF2B5EF4-FFF2-40B4-BE49-F238E27FC236}">
-                <a16:creationId xmlns:a16="http://schemas.microsoft.com/office/drawing/2014/main" id="{523690D1-A489-4650-BF0E-9F37B92BA731}"/>
+                <a16:creationId xmlns:a16="http://schemas.microsoft.com/office/drawing/2014/main" id="{905A7148-65FB-48CA-89CF-B8AAD5D39C4B}"/>
               </a:ext>
             </a:extLst>
           </p:cNvPr>
@@ -5742,6 +5788,7 @@
           <a:lstStyle xmlns:a="http://schemas.openxmlformats.org/drawingml/2006/main"/>
           <a:p xmlns:a="http://schemas.openxmlformats.org/drawingml/2006/main">
             <a:pPr algn="l">
+              <a:buNone/>
               <a:defRPr sz="3375" b="1">
                 <a:solidFill>
                   <a:srgbClr val="0072B2"/>
@@ -5770,7 +5817,7 @@
           <p:cNvPr id="7" name="stat-label-4-360">
             <a:extLst xmlns:a="http://schemas.openxmlformats.org/drawingml/2006/main">
               <a:ext uri="{FF2B5EF4-FFF2-40B4-BE49-F238E27FC236}">
-                <a16:creationId xmlns:a16="http://schemas.microsoft.com/office/drawing/2014/main" id="{BF43A559-D6D6-4970-AF32-1D693A5EFD14}"/>
+                <a16:creationId xmlns:a16="http://schemas.microsoft.com/office/drawing/2014/main" id="{B38D201C-6364-46C9-914C-D3530A551E96}"/>
               </a:ext>
             </a:extLst>
           </p:cNvPr>
@@ -5800,6 +5847,7 @@
           <a:lstStyle xmlns:a="http://schemas.openxmlformats.org/drawingml/2006/main"/>
           <a:p xmlns:a="http://schemas.openxmlformats.org/drawingml/2006/main">
             <a:pPr algn="l">
+              <a:buNone/>
               <a:defRPr sz="1350" b="0">
                 <a:solidFill>
                   <a:srgbClr val="667085"/>
@@ -5828,7 +5876,7 @@
           <p:cNvPr id="8" name="takeaway-4">
             <a:extLst xmlns:a="http://schemas.openxmlformats.org/drawingml/2006/main">
               <a:ext uri="{FF2B5EF4-FFF2-40B4-BE49-F238E27FC236}">
-                <a16:creationId xmlns:a16="http://schemas.microsoft.com/office/drawing/2014/main" id="{6F07A169-192E-485D-ACEC-CD84B7B7B527}"/>
+                <a16:creationId xmlns:a16="http://schemas.microsoft.com/office/drawing/2014/main" id="{195A324B-48A9-44D8-8D15-FFB2E4C1A3D9}"/>
               </a:ext>
             </a:extLst>
           </p:cNvPr>
@@ -5858,6 +5906,7 @@
           <a:lstStyle xmlns:a="http://schemas.openxmlformats.org/drawingml/2006/main"/>
           <a:p xmlns:a="http://schemas.openxmlformats.org/drawingml/2006/main">
             <a:pPr algn="l">
+              <a:buNone/>
               <a:defRPr sz="1425" b="0">
                 <a:solidFill>
                   <a:srgbClr val="172033"/>
@@ -5886,7 +5935,7 @@
           <p:cNvPr id="9" name="source-4">
             <a:extLst xmlns:a="http://schemas.openxmlformats.org/drawingml/2006/main">
               <a:ext uri="{FF2B5EF4-FFF2-40B4-BE49-F238E27FC236}">
-                <a16:creationId xmlns:a16="http://schemas.microsoft.com/office/drawing/2014/main" id="{4504707A-C651-4B35-B95B-C8B7BF9BEEB6}"/>
+                <a16:creationId xmlns:a16="http://schemas.microsoft.com/office/drawing/2014/main" id="{8BA20C2E-6DC2-4562-B33C-CA4B9577F673}"/>
               </a:ext>
             </a:extLst>
           </p:cNvPr>
@@ -5916,6 +5965,7 @@
           <a:lstStyle xmlns:a="http://schemas.openxmlformats.org/drawingml/2006/main"/>
           <a:p xmlns:a="http://schemas.openxmlformats.org/drawingml/2006/main">
             <a:pPr algn="l">
+              <a:buNone/>
               <a:defRPr sz="825" b="0">
                 <a:solidFill>
                   <a:srgbClr val="667085"/>
@@ -5944,7 +5994,7 @@
           <p:cNvPr id="10" name="page-4">
             <a:extLst xmlns:a="http://schemas.openxmlformats.org/drawingml/2006/main">
               <a:ext uri="{FF2B5EF4-FFF2-40B4-BE49-F238E27FC236}">
-                <a16:creationId xmlns:a16="http://schemas.microsoft.com/office/drawing/2014/main" id="{120C16DA-A221-44FB-AF53-E9E03C0C7B63}"/>
+                <a16:creationId xmlns:a16="http://schemas.microsoft.com/office/drawing/2014/main" id="{34E2B289-5452-4246-A380-B8A00095169A}"/>
               </a:ext>
             </a:extLst>
           </p:cNvPr>
@@ -5974,6 +6024,7 @@
           <a:lstStyle xmlns:a="http://schemas.openxmlformats.org/drawingml/2006/main"/>
           <a:p xmlns:a="http://schemas.openxmlformats.org/drawingml/2006/main">
             <a:pPr algn="r">
+              <a:buNone/>
               <a:defRPr sz="900" b="0">
                 <a:solidFill>
                   <a:srgbClr val="667085"/>
@@ -6000,7 +6051,7 @@
     </p:spTree>
     <p:extLst>
       <p:ext uri="{BB962C8B-B14F-4D97-AF65-F5344CB8AC3E}">
-        <p14:creationId xmlns:p14="http://schemas.microsoft.com/office/powerpoint/2010/main" val="655489030"/>
+        <p14:creationId xmlns:p14="http://schemas.microsoft.com/office/powerpoint/2010/main" val="7880510"/>
       </p:ext>
     </p:extLst>
   </p:cSld>
@@ -6031,7 +6082,7 @@
           <p:cNvPr id="1" name="title-5">
             <a:extLst xmlns:a="http://schemas.openxmlformats.org/drawingml/2006/main">
               <a:ext uri="{FF2B5EF4-FFF2-40B4-BE49-F238E27FC236}">
-                <a16:creationId xmlns:a16="http://schemas.microsoft.com/office/drawing/2014/main" id="{2E5391D0-73AC-43EC-8B20-C54AB78D8166}"/>
+                <a16:creationId xmlns:a16="http://schemas.microsoft.com/office/drawing/2014/main" id="{A8CF4CCD-06E5-4F8A-8F33-FF9D88935E69}"/>
               </a:ext>
             </a:extLst>
           </p:cNvPr>
@@ -6061,6 +6112,7 @@
           <a:lstStyle xmlns:a="http://schemas.openxmlformats.org/drawingml/2006/main"/>
           <a:p xmlns:a="http://schemas.openxmlformats.org/drawingml/2006/main">
             <a:pPr algn="l">
+              <a:buNone/>
               <a:defRPr sz="3525" b="1">
                 <a:solidFill>
                   <a:srgbClr val="172033"/>
@@ -6086,14 +6138,14 @@
       </p:sp>
       <p:pic>
         <p:nvPicPr>
-          <p:cNvPr id="12" name=""/>
+          <p:cNvPr id="13" name=""/>
           <p:cNvPicPr>
             <a:picLocks xmlns:a="http://schemas.openxmlformats.org/drawingml/2006/main" noChangeAspect="1"/>
           </p:cNvPicPr>
           <p:nvPr/>
         </p:nvPicPr>
         <p:blipFill>
-          <a:blip xmlns:r="http://schemas.openxmlformats.org/officeDocument/2006/relationships" xmlns:a="http://schemas.openxmlformats.org/drawingml/2006/main" r:embed="R3ca5f36dd3574ffb"/>
+          <a:blip xmlns:r="http://schemas.openxmlformats.org/officeDocument/2006/relationships" xmlns:a="http://schemas.openxmlformats.org/drawingml/2006/main" r:embed="Rc2f7d70fb69a429d"/>
           <a:stretch xmlns:a="http://schemas.openxmlformats.org/drawingml/2006/main"/>
         </p:blipFill>
         <p:spPr>
@@ -6111,7 +6163,7 @@
           <p:cNvPr id="3" name="rail-header-5">
             <a:extLst xmlns:a="http://schemas.openxmlformats.org/drawingml/2006/main">
               <a:ext uri="{FF2B5EF4-FFF2-40B4-BE49-F238E27FC236}">
-                <a16:creationId xmlns:a16="http://schemas.microsoft.com/office/drawing/2014/main" id="{7B68B7C7-7FD2-4C40-9E61-1B12FB400B2D}"/>
+                <a16:creationId xmlns:a16="http://schemas.microsoft.com/office/drawing/2014/main" id="{287E5E4A-E3CC-40B6-AC84-B597345E77CA}"/>
               </a:ext>
             </a:extLst>
           </p:cNvPr>
@@ -6141,6 +6193,7 @@
           <a:lstStyle xmlns:a="http://schemas.openxmlformats.org/drawingml/2006/main"/>
           <a:p xmlns:a="http://schemas.openxmlformats.org/drawingml/2006/main">
             <a:pPr algn="l">
+              <a:buNone/>
               <a:defRPr sz="1800" b="1">
                 <a:solidFill>
                   <a:srgbClr val="172033"/>
@@ -6169,7 +6222,7 @@
           <p:cNvPr id="4" name="stat-5-218">
             <a:extLst xmlns:a="http://schemas.openxmlformats.org/drawingml/2006/main">
               <a:ext uri="{FF2B5EF4-FFF2-40B4-BE49-F238E27FC236}">
-                <a16:creationId xmlns:a16="http://schemas.microsoft.com/office/drawing/2014/main" id="{6442690F-2739-47A0-B347-55098BE31D91}"/>
+                <a16:creationId xmlns:a16="http://schemas.microsoft.com/office/drawing/2014/main" id="{5754435A-517F-4FCD-96E0-7CB3F2F1EFE5}"/>
               </a:ext>
             </a:extLst>
           </p:cNvPr>
@@ -6199,6 +6252,7 @@
           <a:lstStyle xmlns:a="http://schemas.openxmlformats.org/drawingml/2006/main"/>
           <a:p xmlns:a="http://schemas.openxmlformats.org/drawingml/2006/main">
             <a:pPr algn="l">
+              <a:buNone/>
               <a:defRPr sz="3375" b="1">
                 <a:solidFill>
                   <a:srgbClr val="0072B2"/>
@@ -6227,7 +6281,7 @@
           <p:cNvPr id="5" name="stat-label-5-218">
             <a:extLst xmlns:a="http://schemas.openxmlformats.org/drawingml/2006/main">
               <a:ext uri="{FF2B5EF4-FFF2-40B4-BE49-F238E27FC236}">
-                <a16:creationId xmlns:a16="http://schemas.microsoft.com/office/drawing/2014/main" id="{3FCEA26A-9245-4C8F-B216-F7839DB0E6C8}"/>
+                <a16:creationId xmlns:a16="http://schemas.microsoft.com/office/drawing/2014/main" id="{E1123F57-6D23-44D3-B666-368AA1B3314F}"/>
               </a:ext>
             </a:extLst>
           </p:cNvPr>
@@ -6257,6 +6311,7 @@
           <a:lstStyle xmlns:a="http://schemas.openxmlformats.org/drawingml/2006/main"/>
           <a:p xmlns:a="http://schemas.openxmlformats.org/drawingml/2006/main">
             <a:pPr algn="l">
+              <a:buNone/>
               <a:defRPr sz="1350" b="0">
                 <a:solidFill>
                   <a:srgbClr val="667085"/>
@@ -6285,7 +6340,7 @@
           <p:cNvPr id="6" name="stat-5-360">
             <a:extLst xmlns:a="http://schemas.openxmlformats.org/drawingml/2006/main">
               <a:ext uri="{FF2B5EF4-FFF2-40B4-BE49-F238E27FC236}">
-                <a16:creationId xmlns:a16="http://schemas.microsoft.com/office/drawing/2014/main" id="{B63F34FD-FDC0-479E-8C7C-A8C664F22D1B}"/>
+                <a16:creationId xmlns:a16="http://schemas.microsoft.com/office/drawing/2014/main" id="{C23FA94B-CD0C-44CD-8B82-467E71F1D520}"/>
               </a:ext>
             </a:extLst>
           </p:cNvPr>
@@ -6315,6 +6370,7 @@
           <a:lstStyle xmlns:a="http://schemas.openxmlformats.org/drawingml/2006/main"/>
           <a:p xmlns:a="http://schemas.openxmlformats.org/drawingml/2006/main">
             <a:pPr algn="l">
+              <a:buNone/>
               <a:defRPr sz="3375" b="1">
                 <a:solidFill>
                   <a:srgbClr val="667085"/>
@@ -6343,7 +6399,7 @@
           <p:cNvPr id="7" name="stat-label-5-360">
             <a:extLst xmlns:a="http://schemas.openxmlformats.org/drawingml/2006/main">
               <a:ext uri="{FF2B5EF4-FFF2-40B4-BE49-F238E27FC236}">
-                <a16:creationId xmlns:a16="http://schemas.microsoft.com/office/drawing/2014/main" id="{A985BA3E-9270-4801-B7C5-3BDC7B053FE7}"/>
+                <a16:creationId xmlns:a16="http://schemas.microsoft.com/office/drawing/2014/main" id="{BBA032A6-3418-4981-9A4A-F535D9068330}"/>
               </a:ext>
             </a:extLst>
           </p:cNvPr>
@@ -6373,6 +6429,7 @@
           <a:lstStyle xmlns:a="http://schemas.openxmlformats.org/drawingml/2006/main"/>
           <a:p xmlns:a="http://schemas.openxmlformats.org/drawingml/2006/main">
             <a:pPr algn="l">
+              <a:buNone/>
               <a:defRPr sz="1350" b="0">
                 <a:solidFill>
                   <a:srgbClr val="667085"/>
@@ -6401,7 +6458,7 @@
           <p:cNvPr id="8" name="takeaway-5">
             <a:extLst xmlns:a="http://schemas.openxmlformats.org/drawingml/2006/main">
               <a:ext uri="{FF2B5EF4-FFF2-40B4-BE49-F238E27FC236}">
-                <a16:creationId xmlns:a16="http://schemas.microsoft.com/office/drawing/2014/main" id="{BDAF63EA-3874-48F9-860A-EB74D25CBCFE}"/>
+                <a16:creationId xmlns:a16="http://schemas.microsoft.com/office/drawing/2014/main" id="{B9206588-4813-4FD6-87BE-53DF2B0E58DE}"/>
               </a:ext>
             </a:extLst>
           </p:cNvPr>
@@ -6431,6 +6488,7 @@
           <a:lstStyle xmlns:a="http://schemas.openxmlformats.org/drawingml/2006/main"/>
           <a:p xmlns:a="http://schemas.openxmlformats.org/drawingml/2006/main">
             <a:pPr algn="l">
+              <a:buNone/>
               <a:defRPr sz="1425" b="0">
                 <a:solidFill>
                   <a:srgbClr val="172033"/>
@@ -6459,7 +6517,7 @@
           <p:cNvPr id="9" name="source-5">
             <a:extLst xmlns:a="http://schemas.openxmlformats.org/drawingml/2006/main">
               <a:ext uri="{FF2B5EF4-FFF2-40B4-BE49-F238E27FC236}">
-                <a16:creationId xmlns:a16="http://schemas.microsoft.com/office/drawing/2014/main" id="{23A3E098-CAE3-427C-A0EF-3E0B1F2AB039}"/>
+                <a16:creationId xmlns:a16="http://schemas.microsoft.com/office/drawing/2014/main" id="{01AE961A-E560-4221-91DA-7637BE037E45}"/>
               </a:ext>
             </a:extLst>
           </p:cNvPr>
@@ -6489,6 +6547,7 @@
           <a:lstStyle xmlns:a="http://schemas.openxmlformats.org/drawingml/2006/main"/>
           <a:p xmlns:a="http://schemas.openxmlformats.org/drawingml/2006/main">
             <a:pPr algn="l">
+              <a:buNone/>
               <a:defRPr sz="825" b="0">
                 <a:solidFill>
                   <a:srgbClr val="667085"/>
@@ -6517,7 +6576,7 @@
           <p:cNvPr id="10" name="page-5">
             <a:extLst xmlns:a="http://schemas.openxmlformats.org/drawingml/2006/main">
               <a:ext uri="{FF2B5EF4-FFF2-40B4-BE49-F238E27FC236}">
-                <a16:creationId xmlns:a16="http://schemas.microsoft.com/office/drawing/2014/main" id="{532E75C3-4D1C-4142-9CD1-8A66D3BDBC0B}"/>
+                <a16:creationId xmlns:a16="http://schemas.microsoft.com/office/drawing/2014/main" id="{82892FDE-5F2C-4BF0-90B0-0F1623E940AC}"/>
               </a:ext>
             </a:extLst>
           </p:cNvPr>
@@ -6547,6 +6606,7 @@
           <a:lstStyle xmlns:a="http://schemas.openxmlformats.org/drawingml/2006/main"/>
           <a:p xmlns:a="http://schemas.openxmlformats.org/drawingml/2006/main">
             <a:pPr algn="r">
+              <a:buNone/>
               <a:defRPr sz="900" b="0">
                 <a:solidFill>
                   <a:srgbClr val="667085"/>
@@ -6573,7 +6633,7 @@
     </p:spTree>
     <p:extLst>
       <p:ext uri="{BB962C8B-B14F-4D97-AF65-F5344CB8AC3E}">
-        <p14:creationId xmlns:p14="http://schemas.microsoft.com/office/powerpoint/2010/main" val="1841189997"/>
+        <p14:creationId xmlns:p14="http://schemas.microsoft.com/office/powerpoint/2010/main" val="49760440"/>
       </p:ext>
     </p:extLst>
   </p:cSld>
@@ -6604,7 +6664,7 @@
           <p:cNvPr id="1" name="title-6">
             <a:extLst xmlns:a="http://schemas.openxmlformats.org/drawingml/2006/main">
               <a:ext uri="{FF2B5EF4-FFF2-40B4-BE49-F238E27FC236}">
-                <a16:creationId xmlns:a16="http://schemas.microsoft.com/office/drawing/2014/main" id="{15658F2B-AAF4-4BFB-AE43-9DEB33E845A4}"/>
+                <a16:creationId xmlns:a16="http://schemas.microsoft.com/office/drawing/2014/main" id="{5AB68633-4C1A-4BC8-8390-0F9F532E4FFE}"/>
               </a:ext>
             </a:extLst>
           </p:cNvPr>
@@ -6634,6 +6694,7 @@
           <a:lstStyle xmlns:a="http://schemas.openxmlformats.org/drawingml/2006/main"/>
           <a:p xmlns:a="http://schemas.openxmlformats.org/drawingml/2006/main">
             <a:pPr algn="l">
+              <a:buNone/>
               <a:defRPr sz="3525" b="1">
                 <a:solidFill>
                   <a:srgbClr val="172033"/>
@@ -6659,14 +6720,14 @@
       </p:sp>
       <p:pic>
         <p:nvPicPr>
-          <p:cNvPr id="12" name=""/>
+          <p:cNvPr id="13" name=""/>
           <p:cNvPicPr>
             <a:picLocks xmlns:a="http://schemas.openxmlformats.org/drawingml/2006/main" noChangeAspect="1"/>
           </p:cNvPicPr>
           <p:nvPr/>
         </p:nvPicPr>
         <p:blipFill>
-          <a:blip xmlns:r="http://schemas.openxmlformats.org/officeDocument/2006/relationships" xmlns:a="http://schemas.openxmlformats.org/drawingml/2006/main" r:embed="R13db1d6eb0a845bf"/>
+          <a:blip xmlns:r="http://schemas.openxmlformats.org/officeDocument/2006/relationships" xmlns:a="http://schemas.openxmlformats.org/drawingml/2006/main" r:embed="R712c747a4fd74ba9"/>
           <a:stretch xmlns:a="http://schemas.openxmlformats.org/drawingml/2006/main"/>
         </p:blipFill>
         <p:spPr>
@@ -6684,7 +6745,7 @@
           <p:cNvPr id="3" name="rail-header-6">
             <a:extLst xmlns:a="http://schemas.openxmlformats.org/drawingml/2006/main">
               <a:ext uri="{FF2B5EF4-FFF2-40B4-BE49-F238E27FC236}">
-                <a16:creationId xmlns:a16="http://schemas.microsoft.com/office/drawing/2014/main" id="{8F6B2777-543C-4009-A9C4-87AE42E8DA30}"/>
+                <a16:creationId xmlns:a16="http://schemas.microsoft.com/office/drawing/2014/main" id="{8A74E1BD-9512-48A8-A11F-C2F215EB41F2}"/>
               </a:ext>
             </a:extLst>
           </p:cNvPr>
@@ -6714,6 +6775,7 @@
           <a:lstStyle xmlns:a="http://schemas.openxmlformats.org/drawingml/2006/main"/>
           <a:p xmlns:a="http://schemas.openxmlformats.org/drawingml/2006/main">
             <a:pPr algn="l">
+              <a:buNone/>
               <a:defRPr sz="1800" b="1">
                 <a:solidFill>
                   <a:srgbClr val="172033"/>
@@ -6742,7 +6804,7 @@
           <p:cNvPr id="4" name="stat-6-218">
             <a:extLst xmlns:a="http://schemas.openxmlformats.org/drawingml/2006/main">
               <a:ext uri="{FF2B5EF4-FFF2-40B4-BE49-F238E27FC236}">
-                <a16:creationId xmlns:a16="http://schemas.microsoft.com/office/drawing/2014/main" id="{BBCDE29C-F702-4EDC-82FB-1ABC56382EB5}"/>
+                <a16:creationId xmlns:a16="http://schemas.microsoft.com/office/drawing/2014/main" id="{D5C70407-CF6F-4A96-BD81-647FB70ED64F}"/>
               </a:ext>
             </a:extLst>
           </p:cNvPr>
@@ -6772,6 +6834,7 @@
           <a:lstStyle xmlns:a="http://schemas.openxmlformats.org/drawingml/2006/main"/>
           <a:p xmlns:a="http://schemas.openxmlformats.org/drawingml/2006/main">
             <a:pPr algn="l">
+              <a:buNone/>
               <a:defRPr sz="3375" b="1">
                 <a:solidFill>
                   <a:srgbClr val="D55E00"/>
@@ -6800,7 +6863,7 @@
           <p:cNvPr id="5" name="stat-label-6-218">
             <a:extLst xmlns:a="http://schemas.openxmlformats.org/drawingml/2006/main">
               <a:ext uri="{FF2B5EF4-FFF2-40B4-BE49-F238E27FC236}">
-                <a16:creationId xmlns:a16="http://schemas.microsoft.com/office/drawing/2014/main" id="{D59039B9-F098-4098-AD32-6F1EF1208A0D}"/>
+                <a16:creationId xmlns:a16="http://schemas.microsoft.com/office/drawing/2014/main" id="{B24AFB4E-0D03-4DCA-A5A2-BDB9837E8BEA}"/>
               </a:ext>
             </a:extLst>
           </p:cNvPr>
@@ -6830,6 +6893,7 @@
           <a:lstStyle xmlns:a="http://schemas.openxmlformats.org/drawingml/2006/main"/>
           <a:p xmlns:a="http://schemas.openxmlformats.org/drawingml/2006/main">
             <a:pPr algn="l">
+              <a:buNone/>
               <a:defRPr sz="1350" b="0">
                 <a:solidFill>
                   <a:srgbClr val="667085"/>
@@ -6858,7 +6922,7 @@
           <p:cNvPr id="6" name="stat-6-360">
             <a:extLst xmlns:a="http://schemas.openxmlformats.org/drawingml/2006/main">
               <a:ext uri="{FF2B5EF4-FFF2-40B4-BE49-F238E27FC236}">
-                <a16:creationId xmlns:a16="http://schemas.microsoft.com/office/drawing/2014/main" id="{C556164B-8A66-45D2-86AE-9A0C935D363B}"/>
+                <a16:creationId xmlns:a16="http://schemas.microsoft.com/office/drawing/2014/main" id="{C8B631E4-8A57-4265-AD43-70C4162F916D}"/>
               </a:ext>
             </a:extLst>
           </p:cNvPr>
@@ -6888,6 +6952,7 @@
           <a:lstStyle xmlns:a="http://schemas.openxmlformats.org/drawingml/2006/main"/>
           <a:p xmlns:a="http://schemas.openxmlformats.org/drawingml/2006/main">
             <a:pPr algn="l">
+              <a:buNone/>
               <a:defRPr sz="3375" b="1">
                 <a:solidFill>
                   <a:srgbClr val="E69F00"/>
@@ -6916,7 +6981,7 @@
           <p:cNvPr id="7" name="stat-label-6-360">
             <a:extLst xmlns:a="http://schemas.openxmlformats.org/drawingml/2006/main">
               <a:ext uri="{FF2B5EF4-FFF2-40B4-BE49-F238E27FC236}">
-                <a16:creationId xmlns:a16="http://schemas.microsoft.com/office/drawing/2014/main" id="{70014A12-5DDE-4540-8A06-ED741F3BC018}"/>
+                <a16:creationId xmlns:a16="http://schemas.microsoft.com/office/drawing/2014/main" id="{AD1AA263-56FC-4463-A274-7B50272119AD}"/>
               </a:ext>
             </a:extLst>
           </p:cNvPr>
@@ -6946,6 +7011,7 @@
           <a:lstStyle xmlns:a="http://schemas.openxmlformats.org/drawingml/2006/main"/>
           <a:p xmlns:a="http://schemas.openxmlformats.org/drawingml/2006/main">
             <a:pPr algn="l">
+              <a:buNone/>
               <a:defRPr sz="1350" b="0">
                 <a:solidFill>
                   <a:srgbClr val="667085"/>
@@ -6974,7 +7040,7 @@
           <p:cNvPr id="8" name="takeaway-6">
             <a:extLst xmlns:a="http://schemas.openxmlformats.org/drawingml/2006/main">
               <a:ext uri="{FF2B5EF4-FFF2-40B4-BE49-F238E27FC236}">
-                <a16:creationId xmlns:a16="http://schemas.microsoft.com/office/drawing/2014/main" id="{437BC3BF-3EA7-43AA-9BCA-2FCEA0B2B857}"/>
+                <a16:creationId xmlns:a16="http://schemas.microsoft.com/office/drawing/2014/main" id="{E35E8FE4-3B95-457B-BC18-8A6C04B98C3B}"/>
               </a:ext>
             </a:extLst>
           </p:cNvPr>
@@ -7004,6 +7070,7 @@
           <a:lstStyle xmlns:a="http://schemas.openxmlformats.org/drawingml/2006/main"/>
           <a:p xmlns:a="http://schemas.openxmlformats.org/drawingml/2006/main">
             <a:pPr algn="l">
+              <a:buNone/>
               <a:defRPr sz="1425" b="0">
                 <a:solidFill>
                   <a:srgbClr val="172033"/>
@@ -7032,7 +7099,7 @@
           <p:cNvPr id="9" name="source-6">
             <a:extLst xmlns:a="http://schemas.openxmlformats.org/drawingml/2006/main">
               <a:ext uri="{FF2B5EF4-FFF2-40B4-BE49-F238E27FC236}">
-                <a16:creationId xmlns:a16="http://schemas.microsoft.com/office/drawing/2014/main" id="{A73C16BE-88C7-4A60-A8FC-23D456C6D06E}"/>
+                <a16:creationId xmlns:a16="http://schemas.microsoft.com/office/drawing/2014/main" id="{55F92438-6F7E-468B-B88F-77D508824ACC}"/>
               </a:ext>
             </a:extLst>
           </p:cNvPr>
@@ -7062,6 +7129,7 @@
           <a:lstStyle xmlns:a="http://schemas.openxmlformats.org/drawingml/2006/main"/>
           <a:p xmlns:a="http://schemas.openxmlformats.org/drawingml/2006/main">
             <a:pPr algn="l">
+              <a:buNone/>
               <a:defRPr sz="825" b="0">
                 <a:solidFill>
                   <a:srgbClr val="667085"/>
@@ -7090,7 +7158,7 @@
           <p:cNvPr id="10" name="page-6">
             <a:extLst xmlns:a="http://schemas.openxmlformats.org/drawingml/2006/main">
               <a:ext uri="{FF2B5EF4-FFF2-40B4-BE49-F238E27FC236}">
-                <a16:creationId xmlns:a16="http://schemas.microsoft.com/office/drawing/2014/main" id="{B3715921-E87D-42AC-A05E-6C5A8B228B29}"/>
+                <a16:creationId xmlns:a16="http://schemas.microsoft.com/office/drawing/2014/main" id="{97E2CE02-6B99-47EB-938C-EC7153C014F7}"/>
               </a:ext>
             </a:extLst>
           </p:cNvPr>
@@ -7120,6 +7188,7 @@
           <a:lstStyle xmlns:a="http://schemas.openxmlformats.org/drawingml/2006/main"/>
           <a:p xmlns:a="http://schemas.openxmlformats.org/drawingml/2006/main">
             <a:pPr algn="r">
+              <a:buNone/>
               <a:defRPr sz="900" b="0">
                 <a:solidFill>
                   <a:srgbClr val="667085"/>
@@ -7146,7 +7215,7 @@
     </p:spTree>
     <p:extLst>
       <p:ext uri="{BB962C8B-B14F-4D97-AF65-F5344CB8AC3E}">
-        <p14:creationId xmlns:p14="http://schemas.microsoft.com/office/powerpoint/2010/main" val="1611388756"/>
+        <p14:creationId xmlns:p14="http://schemas.microsoft.com/office/powerpoint/2010/main" val="1851541976"/>
       </p:ext>
     </p:extLst>
   </p:cSld>
@@ -7177,7 +7246,7 @@
           <p:cNvPr id="1" name="title-7">
             <a:extLst xmlns:a="http://schemas.openxmlformats.org/drawingml/2006/main">
               <a:ext uri="{FF2B5EF4-FFF2-40B4-BE49-F238E27FC236}">
-                <a16:creationId xmlns:a16="http://schemas.microsoft.com/office/drawing/2014/main" id="{3A4A5429-E8A6-4876-AAEB-5D9029CD36A0}"/>
+                <a16:creationId xmlns:a16="http://schemas.microsoft.com/office/drawing/2014/main" id="{6B2F49B8-455D-4600-A247-1FB9F07858FE}"/>
               </a:ext>
             </a:extLst>
           </p:cNvPr>
@@ -7207,6 +7276,7 @@
           <a:lstStyle xmlns:a="http://schemas.openxmlformats.org/drawingml/2006/main"/>
           <a:p xmlns:a="http://schemas.openxmlformats.org/drawingml/2006/main">
             <a:pPr algn="l">
+              <a:buNone/>
               <a:defRPr sz="3525" b="1">
                 <a:solidFill>
                   <a:srgbClr val="172033"/>
@@ -7232,14 +7302,14 @@
       </p:sp>
       <p:pic>
         <p:nvPicPr>
-          <p:cNvPr id="12" name=""/>
+          <p:cNvPr id="13" name=""/>
           <p:cNvPicPr>
             <a:picLocks xmlns:a="http://schemas.openxmlformats.org/drawingml/2006/main" noChangeAspect="1"/>
           </p:cNvPicPr>
           <p:nvPr/>
         </p:nvPicPr>
         <p:blipFill>
-          <a:blip xmlns:r="http://schemas.openxmlformats.org/officeDocument/2006/relationships" xmlns:a="http://schemas.openxmlformats.org/drawingml/2006/main" r:embed="R1b911a53ad234de6"/>
+          <a:blip xmlns:r="http://schemas.openxmlformats.org/officeDocument/2006/relationships" xmlns:a="http://schemas.openxmlformats.org/drawingml/2006/main" r:embed="Rd902fb1896c3472c"/>
           <a:stretch xmlns:a="http://schemas.openxmlformats.org/drawingml/2006/main"/>
         </p:blipFill>
         <p:spPr>
@@ -7257,7 +7327,7 @@
           <p:cNvPr id="3" name="rail-header-7">
             <a:extLst xmlns:a="http://schemas.openxmlformats.org/drawingml/2006/main">
               <a:ext uri="{FF2B5EF4-FFF2-40B4-BE49-F238E27FC236}">
-                <a16:creationId xmlns:a16="http://schemas.microsoft.com/office/drawing/2014/main" id="{5CAC84CE-0451-4869-8F59-839B3F6432FD}"/>
+                <a16:creationId xmlns:a16="http://schemas.microsoft.com/office/drawing/2014/main" id="{E9ADEC12-4366-4F8B-A2FC-0131E481046C}"/>
               </a:ext>
             </a:extLst>
           </p:cNvPr>
@@ -7287,6 +7357,7 @@
           <a:lstStyle xmlns:a="http://schemas.openxmlformats.org/drawingml/2006/main"/>
           <a:p xmlns:a="http://schemas.openxmlformats.org/drawingml/2006/main">
             <a:pPr algn="l">
+              <a:buNone/>
               <a:defRPr sz="1800" b="1">
                 <a:solidFill>
                   <a:srgbClr val="172033"/>
@@ -7315,7 +7386,7 @@
           <p:cNvPr id="4" name="stat-7-218">
             <a:extLst xmlns:a="http://schemas.openxmlformats.org/drawingml/2006/main">
               <a:ext uri="{FF2B5EF4-FFF2-40B4-BE49-F238E27FC236}">
-                <a16:creationId xmlns:a16="http://schemas.microsoft.com/office/drawing/2014/main" id="{EDB0CD9D-B495-4B57-AED6-BB5F8899C6E0}"/>
+                <a16:creationId xmlns:a16="http://schemas.microsoft.com/office/drawing/2014/main" id="{9DF09DC8-181A-42F5-99EE-DF43A474D2D9}"/>
               </a:ext>
             </a:extLst>
           </p:cNvPr>
@@ -7345,6 +7416,7 @@
           <a:lstStyle xmlns:a="http://schemas.openxmlformats.org/drawingml/2006/main"/>
           <a:p xmlns:a="http://schemas.openxmlformats.org/drawingml/2006/main">
             <a:pPr algn="l">
+              <a:buNone/>
               <a:defRPr sz="3375" b="1">
                 <a:solidFill>
                   <a:srgbClr val="0072B2"/>
@@ -7373,7 +7445,7 @@
           <p:cNvPr id="5" name="stat-label-7-218">
             <a:extLst xmlns:a="http://schemas.openxmlformats.org/drawingml/2006/main">
               <a:ext uri="{FF2B5EF4-FFF2-40B4-BE49-F238E27FC236}">
-                <a16:creationId xmlns:a16="http://schemas.microsoft.com/office/drawing/2014/main" id="{8E4D6611-1632-4245-8BFB-9B150D0DB2CD}"/>
+                <a16:creationId xmlns:a16="http://schemas.microsoft.com/office/drawing/2014/main" id="{0A8E0FC5-35D1-4503-AD7F-0656586EF0F0}"/>
               </a:ext>
             </a:extLst>
           </p:cNvPr>
@@ -7403,6 +7475,7 @@
           <a:lstStyle xmlns:a="http://schemas.openxmlformats.org/drawingml/2006/main"/>
           <a:p xmlns:a="http://schemas.openxmlformats.org/drawingml/2006/main">
             <a:pPr algn="l">
+              <a:buNone/>
               <a:defRPr sz="1350" b="0">
                 <a:solidFill>
                   <a:srgbClr val="667085"/>
@@ -7431,7 +7504,7 @@
           <p:cNvPr id="6" name="stat-7-360">
             <a:extLst xmlns:a="http://schemas.openxmlformats.org/drawingml/2006/main">
               <a:ext uri="{FF2B5EF4-FFF2-40B4-BE49-F238E27FC236}">
-                <a16:creationId xmlns:a16="http://schemas.microsoft.com/office/drawing/2014/main" id="{32A9439C-5263-47EC-B844-F8509CF6B9AB}"/>
+                <a16:creationId xmlns:a16="http://schemas.microsoft.com/office/drawing/2014/main" id="{18D61181-DFFC-4AD6-B692-CE28538AED7D}"/>
               </a:ext>
             </a:extLst>
           </p:cNvPr>
@@ -7461,6 +7534,7 @@
           <a:lstStyle xmlns:a="http://schemas.openxmlformats.org/drawingml/2006/main"/>
           <a:p xmlns:a="http://schemas.openxmlformats.org/drawingml/2006/main">
             <a:pPr algn="l">
+              <a:buNone/>
               <a:defRPr sz="3375" b="1">
                 <a:solidFill>
                   <a:srgbClr val="667085"/>
@@ -7489,7 +7563,7 @@
           <p:cNvPr id="7" name="stat-label-7-360">
             <a:extLst xmlns:a="http://schemas.openxmlformats.org/drawingml/2006/main">
               <a:ext uri="{FF2B5EF4-FFF2-40B4-BE49-F238E27FC236}">
-                <a16:creationId xmlns:a16="http://schemas.microsoft.com/office/drawing/2014/main" id="{3D05D0D6-913E-4F59-BCF7-44482BBE6878}"/>
+                <a16:creationId xmlns:a16="http://schemas.microsoft.com/office/drawing/2014/main" id="{8EA922D9-F4A6-4D4A-96B4-FE49E4DB720A}"/>
               </a:ext>
             </a:extLst>
           </p:cNvPr>
@@ -7519,6 +7593,7 @@
           <a:lstStyle xmlns:a="http://schemas.openxmlformats.org/drawingml/2006/main"/>
           <a:p xmlns:a="http://schemas.openxmlformats.org/drawingml/2006/main">
             <a:pPr algn="l">
+              <a:buNone/>
               <a:defRPr sz="1350" b="0">
                 <a:solidFill>
                   <a:srgbClr val="667085"/>
@@ -7547,7 +7622,7 @@
           <p:cNvPr id="8" name="takeaway-7">
             <a:extLst xmlns:a="http://schemas.openxmlformats.org/drawingml/2006/main">
               <a:ext uri="{FF2B5EF4-FFF2-40B4-BE49-F238E27FC236}">
-                <a16:creationId xmlns:a16="http://schemas.microsoft.com/office/drawing/2014/main" id="{6E27E4E8-5717-495F-A5EF-DEEF9762B45B}"/>
+                <a16:creationId xmlns:a16="http://schemas.microsoft.com/office/drawing/2014/main" id="{C8A3B13D-8724-4483-BF41-5BFEBCC2C8E8}"/>
               </a:ext>
             </a:extLst>
           </p:cNvPr>
@@ -7577,6 +7652,7 @@
           <a:lstStyle xmlns:a="http://schemas.openxmlformats.org/drawingml/2006/main"/>
           <a:p xmlns:a="http://schemas.openxmlformats.org/drawingml/2006/main">
             <a:pPr algn="l">
+              <a:buNone/>
               <a:defRPr sz="1425" b="0">
                 <a:solidFill>
                   <a:srgbClr val="172033"/>
@@ -7605,7 +7681,7 @@
           <p:cNvPr id="9" name="source-7">
             <a:extLst xmlns:a="http://schemas.openxmlformats.org/drawingml/2006/main">
               <a:ext uri="{FF2B5EF4-FFF2-40B4-BE49-F238E27FC236}">
-                <a16:creationId xmlns:a16="http://schemas.microsoft.com/office/drawing/2014/main" id="{4F19AD50-F8CD-4204-9BD1-8FEC4912A3E4}"/>
+                <a16:creationId xmlns:a16="http://schemas.microsoft.com/office/drawing/2014/main" id="{E4AB36B9-5F32-4087-BDF2-1CCC2A87A5B6}"/>
               </a:ext>
             </a:extLst>
           </p:cNvPr>
@@ -7635,6 +7711,7 @@
           <a:lstStyle xmlns:a="http://schemas.openxmlformats.org/drawingml/2006/main"/>
           <a:p xmlns:a="http://schemas.openxmlformats.org/drawingml/2006/main">
             <a:pPr algn="l">
+              <a:buNone/>
               <a:defRPr sz="825" b="0">
                 <a:solidFill>
                   <a:srgbClr val="667085"/>
@@ -7663,7 +7740,7 @@
           <p:cNvPr id="10" name="page-7">
             <a:extLst xmlns:a="http://schemas.openxmlformats.org/drawingml/2006/main">
               <a:ext uri="{FF2B5EF4-FFF2-40B4-BE49-F238E27FC236}">
-                <a16:creationId xmlns:a16="http://schemas.microsoft.com/office/drawing/2014/main" id="{AE414B3E-272C-4F1F-9F18-2A2CC47E0E95}"/>
+                <a16:creationId xmlns:a16="http://schemas.microsoft.com/office/drawing/2014/main" id="{263FD2B4-9112-46AD-8DE8-694E58FAA376}"/>
               </a:ext>
             </a:extLst>
           </p:cNvPr>
@@ -7693,6 +7770,7 @@
           <a:lstStyle xmlns:a="http://schemas.openxmlformats.org/drawingml/2006/main"/>
           <a:p xmlns:a="http://schemas.openxmlformats.org/drawingml/2006/main">
             <a:pPr algn="r">
+              <a:buNone/>
               <a:defRPr sz="900" b="0">
                 <a:solidFill>
                   <a:srgbClr val="667085"/>
@@ -7719,7 +7797,7 @@
     </p:spTree>
     <p:extLst>
       <p:ext uri="{BB962C8B-B14F-4D97-AF65-F5344CB8AC3E}">
-        <p14:creationId xmlns:p14="http://schemas.microsoft.com/office/powerpoint/2010/main" val="372529206"/>
+        <p14:creationId xmlns:p14="http://schemas.microsoft.com/office/powerpoint/2010/main" val="938737590"/>
       </p:ext>
     </p:extLst>
   </p:cSld>
@@ -7750,7 +7828,7 @@
           <p:cNvPr id="1" name="title-8">
             <a:extLst xmlns:a="http://schemas.openxmlformats.org/drawingml/2006/main">
               <a:ext uri="{FF2B5EF4-FFF2-40B4-BE49-F238E27FC236}">
-                <a16:creationId xmlns:a16="http://schemas.microsoft.com/office/drawing/2014/main" id="{88537A47-1862-4A54-90EE-AA7B52E965BD}"/>
+                <a16:creationId xmlns:a16="http://schemas.microsoft.com/office/drawing/2014/main" id="{1B27261F-F37E-4FF4-BEF7-9328CDD9E830}"/>
               </a:ext>
             </a:extLst>
           </p:cNvPr>
@@ -7780,6 +7858,7 @@
           <a:lstStyle xmlns:a="http://schemas.openxmlformats.org/drawingml/2006/main"/>
           <a:p xmlns:a="http://schemas.openxmlformats.org/drawingml/2006/main">
             <a:pPr algn="l">
+              <a:buNone/>
               <a:defRPr sz="3525" b="1">
                 <a:solidFill>
                   <a:srgbClr val="172033"/>
@@ -7805,14 +7884,14 @@
       </p:sp>
       <p:pic>
         <p:nvPicPr>
-          <p:cNvPr id="12" name=""/>
+          <p:cNvPr id="13" name=""/>
           <p:cNvPicPr>
             <a:picLocks xmlns:a="http://schemas.openxmlformats.org/drawingml/2006/main" noChangeAspect="1"/>
           </p:cNvPicPr>
           <p:nvPr/>
         </p:nvPicPr>
         <p:blipFill>
-          <a:blip xmlns:r="http://schemas.openxmlformats.org/officeDocument/2006/relationships" xmlns:a="http://schemas.openxmlformats.org/drawingml/2006/main" r:embed="R97323c11b2a24553"/>
+          <a:blip xmlns:r="http://schemas.openxmlformats.org/officeDocument/2006/relationships" xmlns:a="http://schemas.openxmlformats.org/drawingml/2006/main" r:embed="R92cb86fff5194415"/>
           <a:stretch xmlns:a="http://schemas.openxmlformats.org/drawingml/2006/main"/>
         </p:blipFill>
         <p:spPr>
@@ -7830,7 +7909,7 @@
           <p:cNvPr id="3" name="rail-header-8">
             <a:extLst xmlns:a="http://schemas.openxmlformats.org/drawingml/2006/main">
               <a:ext uri="{FF2B5EF4-FFF2-40B4-BE49-F238E27FC236}">
-                <a16:creationId xmlns:a16="http://schemas.microsoft.com/office/drawing/2014/main" id="{5B313319-0C3A-42BA-9D64-577B9D3DE802}"/>
+                <a16:creationId xmlns:a16="http://schemas.microsoft.com/office/drawing/2014/main" id="{BE47D154-902C-4AA2-9DE4-35CDFAFD4FE2}"/>
               </a:ext>
             </a:extLst>
           </p:cNvPr>
@@ -7860,6 +7939,7 @@
           <a:lstStyle xmlns:a="http://schemas.openxmlformats.org/drawingml/2006/main"/>
           <a:p xmlns:a="http://schemas.openxmlformats.org/drawingml/2006/main">
             <a:pPr algn="l">
+              <a:buNone/>
               <a:defRPr sz="1800" b="1">
                 <a:solidFill>
                   <a:srgbClr val="172033"/>
@@ -7888,7 +7968,7 @@
           <p:cNvPr id="4" name="stat-8-218">
             <a:extLst xmlns:a="http://schemas.openxmlformats.org/drawingml/2006/main">
               <a:ext uri="{FF2B5EF4-FFF2-40B4-BE49-F238E27FC236}">
-                <a16:creationId xmlns:a16="http://schemas.microsoft.com/office/drawing/2014/main" id="{6E8CE3F7-89BA-4BDC-9E22-C7B3F0F4D35F}"/>
+                <a16:creationId xmlns:a16="http://schemas.microsoft.com/office/drawing/2014/main" id="{864BC8BB-DEFA-4683-BB91-4C85CB893A11}"/>
               </a:ext>
             </a:extLst>
           </p:cNvPr>
@@ -7918,6 +7998,7 @@
           <a:lstStyle xmlns:a="http://schemas.openxmlformats.org/drawingml/2006/main"/>
           <a:p xmlns:a="http://schemas.openxmlformats.org/drawingml/2006/main">
             <a:pPr algn="l">
+              <a:buNone/>
               <a:defRPr sz="3375" b="1">
                 <a:solidFill>
                   <a:srgbClr val="D55E00"/>
@@ -7946,7 +8027,7 @@
           <p:cNvPr id="5" name="stat-label-8-218">
             <a:extLst xmlns:a="http://schemas.openxmlformats.org/drawingml/2006/main">
               <a:ext uri="{FF2B5EF4-FFF2-40B4-BE49-F238E27FC236}">
-                <a16:creationId xmlns:a16="http://schemas.microsoft.com/office/drawing/2014/main" id="{2187191C-151D-4FC4-90AD-CC31C338A50F}"/>
+                <a16:creationId xmlns:a16="http://schemas.microsoft.com/office/drawing/2014/main" id="{7E9B545C-6BC4-436A-973B-B94C70912DEC}"/>
               </a:ext>
             </a:extLst>
           </p:cNvPr>
@@ -7976,6 +8057,7 @@
           <a:lstStyle xmlns:a="http://schemas.openxmlformats.org/drawingml/2006/main"/>
           <a:p xmlns:a="http://schemas.openxmlformats.org/drawingml/2006/main">
             <a:pPr algn="l">
+              <a:buNone/>
               <a:defRPr sz="1350" b="0">
                 <a:solidFill>
                   <a:srgbClr val="667085"/>
@@ -8004,7 +8086,7 @@
           <p:cNvPr id="6" name="stat-8-360">
             <a:extLst xmlns:a="http://schemas.openxmlformats.org/drawingml/2006/main">
               <a:ext uri="{FF2B5EF4-FFF2-40B4-BE49-F238E27FC236}">
-                <a16:creationId xmlns:a16="http://schemas.microsoft.com/office/drawing/2014/main" id="{AFCDEC3C-25E8-4BF6-9C47-38F7E21C3625}"/>
+                <a16:creationId xmlns:a16="http://schemas.microsoft.com/office/drawing/2014/main" id="{3FB5C75C-5542-45B0-85F2-471FA2E33DD0}"/>
               </a:ext>
             </a:extLst>
           </p:cNvPr>
@@ -8034,6 +8116,7 @@
           <a:lstStyle xmlns:a="http://schemas.openxmlformats.org/drawingml/2006/main"/>
           <a:p xmlns:a="http://schemas.openxmlformats.org/drawingml/2006/main">
             <a:pPr algn="l">
+              <a:buNone/>
               <a:defRPr sz="3375" b="1">
                 <a:solidFill>
                   <a:srgbClr val="0072B2"/>
@@ -8062,7 +8145,7 @@
           <p:cNvPr id="7" name="stat-label-8-360">
             <a:extLst xmlns:a="http://schemas.openxmlformats.org/drawingml/2006/main">
               <a:ext uri="{FF2B5EF4-FFF2-40B4-BE49-F238E27FC236}">
-                <a16:creationId xmlns:a16="http://schemas.microsoft.com/office/drawing/2014/main" id="{F3A61F89-8AED-4CA3-8593-82FF270408B5}"/>
+                <a16:creationId xmlns:a16="http://schemas.microsoft.com/office/drawing/2014/main" id="{E3E560D0-C829-4F12-95F3-A1F716E83DC3}"/>
               </a:ext>
             </a:extLst>
           </p:cNvPr>
@@ -8092,6 +8175,7 @@
           <a:lstStyle xmlns:a="http://schemas.openxmlformats.org/drawingml/2006/main"/>
           <a:p xmlns:a="http://schemas.openxmlformats.org/drawingml/2006/main">
             <a:pPr algn="l">
+              <a:buNone/>
               <a:defRPr sz="1350" b="0">
                 <a:solidFill>
                   <a:srgbClr val="667085"/>
@@ -8120,7 +8204,7 @@
           <p:cNvPr id="8" name="takeaway-8">
             <a:extLst xmlns:a="http://schemas.openxmlformats.org/drawingml/2006/main">
               <a:ext uri="{FF2B5EF4-FFF2-40B4-BE49-F238E27FC236}">
-                <a16:creationId xmlns:a16="http://schemas.microsoft.com/office/drawing/2014/main" id="{68C52BFA-8EAC-483C-BF2F-8E8334BAC70F}"/>
+                <a16:creationId xmlns:a16="http://schemas.microsoft.com/office/drawing/2014/main" id="{BFF44389-23A7-419A-A489-6F6B5D9F6DB3}"/>
               </a:ext>
             </a:extLst>
           </p:cNvPr>
@@ -8150,6 +8234,7 @@
           <a:lstStyle xmlns:a="http://schemas.openxmlformats.org/drawingml/2006/main"/>
           <a:p xmlns:a="http://schemas.openxmlformats.org/drawingml/2006/main">
             <a:pPr algn="l">
+              <a:buNone/>
               <a:defRPr sz="1425" b="0">
                 <a:solidFill>
                   <a:srgbClr val="172033"/>
@@ -8178,7 +8263,7 @@
           <p:cNvPr id="9" name="source-8">
             <a:extLst xmlns:a="http://schemas.openxmlformats.org/drawingml/2006/main">
               <a:ext uri="{FF2B5EF4-FFF2-40B4-BE49-F238E27FC236}">
-                <a16:creationId xmlns:a16="http://schemas.microsoft.com/office/drawing/2014/main" id="{BA2AD709-3F71-434F-A05C-D79C31F79E39}"/>
+                <a16:creationId xmlns:a16="http://schemas.microsoft.com/office/drawing/2014/main" id="{6770559F-1404-4630-9798-C9264384260E}"/>
               </a:ext>
             </a:extLst>
           </p:cNvPr>
@@ -8208,6 +8293,7 @@
           <a:lstStyle xmlns:a="http://schemas.openxmlformats.org/drawingml/2006/main"/>
           <a:p xmlns:a="http://schemas.openxmlformats.org/drawingml/2006/main">
             <a:pPr algn="l">
+              <a:buNone/>
               <a:defRPr sz="825" b="0">
                 <a:solidFill>
                   <a:srgbClr val="667085"/>
@@ -8236,7 +8322,7 @@
           <p:cNvPr id="10" name="page-8">
             <a:extLst xmlns:a="http://schemas.openxmlformats.org/drawingml/2006/main">
               <a:ext uri="{FF2B5EF4-FFF2-40B4-BE49-F238E27FC236}">
-                <a16:creationId xmlns:a16="http://schemas.microsoft.com/office/drawing/2014/main" id="{0B6BF6EA-C6DF-49F2-B527-55EC0ACF8EDA}"/>
+                <a16:creationId xmlns:a16="http://schemas.microsoft.com/office/drawing/2014/main" id="{99A1DE69-CC40-4571-8C65-416ABE04EE00}"/>
               </a:ext>
             </a:extLst>
           </p:cNvPr>
@@ -8266,6 +8352,7 @@
           <a:lstStyle xmlns:a="http://schemas.openxmlformats.org/drawingml/2006/main"/>
           <a:p xmlns:a="http://schemas.openxmlformats.org/drawingml/2006/main">
             <a:pPr algn="r">
+              <a:buNone/>
               <a:defRPr sz="900" b="0">
                 <a:solidFill>
                   <a:srgbClr val="667085"/>
@@ -8292,7 +8379,7 @@
     </p:spTree>
     <p:extLst>
       <p:ext uri="{BB962C8B-B14F-4D97-AF65-F5344CB8AC3E}">
-        <p14:creationId xmlns:p14="http://schemas.microsoft.com/office/powerpoint/2010/main" val="354566854"/>
+        <p14:creationId xmlns:p14="http://schemas.microsoft.com/office/powerpoint/2010/main" val="470450059"/>
       </p:ext>
     </p:extLst>
   </p:cSld>
@@ -8323,7 +8410,7 @@
           <p:cNvPr id="1" name="title-9">
             <a:extLst xmlns:a="http://schemas.openxmlformats.org/drawingml/2006/main">
               <a:ext uri="{FF2B5EF4-FFF2-40B4-BE49-F238E27FC236}">
-                <a16:creationId xmlns:a16="http://schemas.microsoft.com/office/drawing/2014/main" id="{5946F6EA-E6B3-4BCD-8214-EA644C421010}"/>
+                <a16:creationId xmlns:a16="http://schemas.microsoft.com/office/drawing/2014/main" id="{ABFE9ED1-B11B-4314-BF08-3000096C94F8}"/>
               </a:ext>
             </a:extLst>
           </p:cNvPr>
@@ -8353,6 +8440,7 @@
           <a:lstStyle xmlns:a="http://schemas.openxmlformats.org/drawingml/2006/main"/>
           <a:p xmlns:a="http://schemas.openxmlformats.org/drawingml/2006/main">
             <a:pPr algn="l">
+              <a:buNone/>
               <a:defRPr sz="3525" b="1">
                 <a:solidFill>
                   <a:srgbClr val="172033"/>
@@ -8378,14 +8466,14 @@
       </p:sp>
       <p:pic>
         <p:nvPicPr>
-          <p:cNvPr id="6" name=""/>
+          <p:cNvPr id="7" name=""/>
           <p:cNvPicPr>
             <a:picLocks xmlns:a="http://schemas.openxmlformats.org/drawingml/2006/main" noChangeAspect="1"/>
           </p:cNvPicPr>
           <p:nvPr/>
         </p:nvPicPr>
         <p:blipFill>
-          <a:blip xmlns:r="http://schemas.openxmlformats.org/officeDocument/2006/relationships" xmlns:a="http://schemas.openxmlformats.org/drawingml/2006/main" r:embed="Ra7c0f8f780544461"/>
+          <a:blip xmlns:r="http://schemas.openxmlformats.org/officeDocument/2006/relationships" xmlns:a="http://schemas.openxmlformats.org/drawingml/2006/main" r:embed="Rfa19fc2ab4854f34"/>
           <a:stretch xmlns:a="http://schemas.openxmlformats.org/drawingml/2006/main"/>
         </p:blipFill>
         <p:spPr>
@@ -8403,7 +8491,7 @@
           <p:cNvPr id="3" name="source-9">
             <a:extLst xmlns:a="http://schemas.openxmlformats.org/drawingml/2006/main">
               <a:ext uri="{FF2B5EF4-FFF2-40B4-BE49-F238E27FC236}">
-                <a16:creationId xmlns:a16="http://schemas.microsoft.com/office/drawing/2014/main" id="{E2BC11AD-CEE9-43D3-88D3-2D15B3B78E6A}"/>
+                <a16:creationId xmlns:a16="http://schemas.microsoft.com/office/drawing/2014/main" id="{4A358816-AFC9-40EC-B5DA-17E8773CC747}"/>
               </a:ext>
             </a:extLst>
           </p:cNvPr>
@@ -8433,6 +8521,7 @@
           <a:lstStyle xmlns:a="http://schemas.openxmlformats.org/drawingml/2006/main"/>
           <a:p xmlns:a="http://schemas.openxmlformats.org/drawingml/2006/main">
             <a:pPr algn="l">
+              <a:buNone/>
               <a:defRPr sz="825" b="0">
                 <a:solidFill>
                   <a:srgbClr val="667085"/>
@@ -8461,7 +8550,7 @@
           <p:cNvPr id="4" name="page-9">
             <a:extLst xmlns:a="http://schemas.openxmlformats.org/drawingml/2006/main">
               <a:ext uri="{FF2B5EF4-FFF2-40B4-BE49-F238E27FC236}">
-                <a16:creationId xmlns:a16="http://schemas.microsoft.com/office/drawing/2014/main" id="{48A06FAD-97C2-450D-887A-E89C9BDC81BC}"/>
+                <a16:creationId xmlns:a16="http://schemas.microsoft.com/office/drawing/2014/main" id="{7F726455-51EB-4A79-8550-8A92652D72DF}"/>
               </a:ext>
             </a:extLst>
           </p:cNvPr>
@@ -8491,6 +8580,7 @@
           <a:lstStyle xmlns:a="http://schemas.openxmlformats.org/drawingml/2006/main"/>
           <a:p xmlns:a="http://schemas.openxmlformats.org/drawingml/2006/main">
             <a:pPr algn="r">
+              <a:buNone/>
               <a:defRPr sz="900" b="0">
                 <a:solidFill>
                   <a:srgbClr val="667085"/>
@@ -8517,7 +8607,7 @@
     </p:spTree>
     <p:extLst>
       <p:ext uri="{BB962C8B-B14F-4D97-AF65-F5344CB8AC3E}">
-        <p14:creationId xmlns:p14="http://schemas.microsoft.com/office/powerpoint/2010/main" val="1198122888"/>
+        <p14:creationId xmlns:p14="http://schemas.microsoft.com/office/powerpoint/2010/main" val="635299355"/>
       </p:ext>
     </p:extLst>
   </p:cSld>
